--- a/docs/tech-challenge-2/Tech-Challenge-Fase2.pptx
+++ b/docs/tech-challenge-2/Tech-Challenge-Fase2.pptx
@@ -4,6 +4,9 @@
   <p:sldMasterIdLst>
     <p:sldMasterId id="2147483648" r:id="rId1"/>
   </p:sldMasterIdLst>
+  <p:notesMasterIdLst>
+    <p:notesMasterId r:id="rId14"/>
+  </p:notesMasterIdLst>
   <p:sldIdLst>
     <p:sldId id="256" r:id="rId2"/>
     <p:sldId id="257" r:id="rId3"/>
@@ -18,11 +21,8 @@
     <p:sldId id="266" r:id="rId12"/>
     <p:sldId id="267" r:id="rId13"/>
   </p:sldIdLst>
-  <p:notesMasterIdLst>
-    <p:notesMasterId r:id="rId14"/>
-  </p:notesMasterIdLst>
-  <p:sldSz cx="12191695" cy="6858000"/>
-  <p:notesSz cx="6858000" cy="12191695"/>
+  <p:sldSz cx="12192000" cy="6858000"/>
+  <p:notesSz cx="6858000" cy="12192000"/>
   <p:defaultTextStyle>
     <a:lvl1pPr marL="0" algn="l" defTabSz="914400" rtl="0" eaLnBrk="1" latinLnBrk="0" hangingPunct="1">
       <a:defRPr sz="1800" kern="1200">
@@ -115,6 +115,11 @@
       </a:defRPr>
     </a:lvl9pPr>
   </p:defaultTextStyle>
+  <p:extLst>
+    <p:ext uri="{EFAFB233-063F-42B5-8137-9DF3F51BA10A}">
+      <p15:sldGuideLst xmlns:p15="http://schemas.microsoft.com/office/powerpoint/2012/main"/>
+    </p:ext>
+  </p:extLst>
 </p:presentation>
 </file>
 
@@ -140,234 +145,10 @@
           <a:chExt cx="0" cy="0"/>
         </a:xfrm>
       </p:grpSpPr>
-      <p:sp>
-        <p:nvSpPr>
-          <p:cNvPr id="2" name="Header Placeholder 1"/>
-          <p:cNvSpPr>
-            <a:spLocks noGrp="1"/>
-          </p:cNvSpPr>
-          <p:nvPr>
-            <p:ph type="hdr" sz="quarter"/>
-          </p:nvPr>
-        </p:nvSpPr>
-        <p:spPr>
-          <a:xfrm>
-            <a:off x="0" y="0"/>
-            <a:ext cx="2971800" cy="458788"/>
-          </a:xfrm>
-          <a:prstGeom prst="rect">
-            <a:avLst/>
-          </a:prstGeom>
-        </p:spPr>
-        <p:txBody>
-          <a:bodyPr vert="horz" lIns="91440" tIns="45720" rIns="91440" bIns="45720" rtlCol="0"/>
-          <a:lstStyle>
-            <a:lvl1pPr algn="l">
-              <a:defRPr sz="1200"/>
-            </a:lvl1pPr>
-          </a:lstStyle>
-          <a:p>
-            <a:endParaRPr lang="en-US"/>
-          </a:p>
-        </p:txBody>
-      </p:sp>
-      <p:sp>
-        <p:nvSpPr>
-          <p:cNvPr id="3" name="Date Placeholder 2"/>
-          <p:cNvSpPr>
-            <a:spLocks noGrp="1"/>
-          </p:cNvSpPr>
-          <p:nvPr>
-            <p:ph type="dt" idx="1"/>
-          </p:nvPr>
-        </p:nvSpPr>
-        <p:spPr>
-          <a:xfrm>
-            <a:off x="3884613" y="0"/>
-            <a:ext cx="2971800" cy="458788"/>
-          </a:xfrm>
-          <a:prstGeom prst="rect">
-            <a:avLst/>
-          </a:prstGeom>
-        </p:spPr>
-        <p:txBody>
-          <a:bodyPr vert="horz" lIns="91440" tIns="45720" rIns="91440" bIns="45720" rtlCol="0"/>
-          <a:lstStyle>
-            <a:lvl1pPr algn="r">
-              <a:defRPr sz="1200"/>
-            </a:lvl1pPr>
-          </a:lstStyle>
-          <a:p>
-            <a:fld id="{5282F153-3F37-0F45-9E97-73ACFA13230C}" type="datetimeFigureOut">
-              <a:rPr lang="en-US"/>
-              <a:t>7/23/19</a:t>
-            </a:fld>
-            <a:endParaRPr lang="en-US"/>
-          </a:p>
-        </p:txBody>
-      </p:sp>
-      <p:sp>
-        <p:nvSpPr>
-          <p:cNvPr id="4" name="Slide Image Placeholder 3"/>
-          <p:cNvSpPr>
-            <a:spLocks noGrp="1" noRot="1" noChangeAspect="1"/>
-          </p:cNvSpPr>
-          <p:nvPr>
-            <p:ph type="sldImg" idx="2"/>
-          </p:nvPr>
-        </p:nvSpPr>
-        <p:spPr>
-          <a:xfrm>
-            <a:off x="685800" y="1143000"/>
-            <a:ext cx="5486400" cy="3086100"/>
-          </a:xfrm>
-          <a:prstGeom prst="rect">
-            <a:avLst/>
-          </a:prstGeom>
-          <a:noFill/>
-          <a:ln w="12700">
-            <a:solidFill>
-              <a:prstClr val="black"/>
-            </a:solidFill>
-          </a:ln>
-        </p:spPr>
-        <p:txBody>
-          <a:bodyPr vert="horz" lIns="91440" tIns="45720" rIns="91440" bIns="45720" rtlCol="0" anchor="ctr"/>
-          <a:lstStyle/>
-          <a:p>
-            <a:endParaRPr lang="en-US"/>
-          </a:p>
-        </p:txBody>
-      </p:sp>
-      <p:sp>
-        <p:nvSpPr>
-          <p:cNvPr id="5" name="Notes Placeholder 4"/>
-          <p:cNvSpPr>
-            <a:spLocks noGrp="1"/>
-          </p:cNvSpPr>
-          <p:nvPr>
-            <p:ph type="body" sz="quarter" idx="3"/>
-          </p:nvPr>
-        </p:nvSpPr>
-        <p:spPr>
-          <a:xfrm>
-            <a:off x="685800" y="4400550"/>
-            <a:ext cx="5486400" cy="3600450"/>
-          </a:xfrm>
-          <a:prstGeom prst="rect">
-            <a:avLst/>
-          </a:prstGeom>
-        </p:spPr>
-        <p:txBody>
-          <a:bodyPr vert="horz" lIns="91440" tIns="45720" rIns="91440" bIns="45720" rtlCol="0"/>
-          <a:lstStyle/>
-          <a:p>
-            <a:pPr lvl="0"/>
-            <a:r>
-              <a:rPr lang="en-US"/>
-              <a:t>Click to edit Master text styles</a:t>
-            </a:r>
-          </a:p>
-          <a:p>
-            <a:pPr lvl="1"/>
-            <a:r>
-              <a:rPr lang="en-US"/>
-              <a:t>Second level</a:t>
-            </a:r>
-          </a:p>
-          <a:p>
-            <a:pPr lvl="2"/>
-            <a:r>
-              <a:rPr lang="en-US"/>
-              <a:t>Third level</a:t>
-            </a:r>
-          </a:p>
-          <a:p>
-            <a:pPr lvl="3"/>
-            <a:r>
-              <a:rPr lang="en-US"/>
-              <a:t>Fourth level</a:t>
-            </a:r>
-          </a:p>
-          <a:p>
-            <a:pPr lvl="4"/>
-            <a:r>
-              <a:rPr lang="en-US"/>
-              <a:t>Fifth level</a:t>
-            </a:r>
-          </a:p>
-        </p:txBody>
-      </p:sp>
-      <p:sp>
-        <p:nvSpPr>
-          <p:cNvPr id="6" name="Footer Placeholder 5"/>
-          <p:cNvSpPr>
-            <a:spLocks noGrp="1"/>
-          </p:cNvSpPr>
-          <p:nvPr>
-            <p:ph type="ftr" sz="quarter" idx="4"/>
-          </p:nvPr>
-        </p:nvSpPr>
-        <p:spPr>
-          <a:xfrm>
-            <a:off x="0" y="8685213"/>
-            <a:ext cx="2971800" cy="458787"/>
-          </a:xfrm>
-          <a:prstGeom prst="rect">
-            <a:avLst/>
-          </a:prstGeom>
-        </p:spPr>
-        <p:txBody>
-          <a:bodyPr vert="horz" lIns="91440" tIns="45720" rIns="91440" bIns="45720" rtlCol="0" anchor="b"/>
-          <a:lstStyle>
-            <a:lvl1pPr algn="l">
-              <a:defRPr sz="1200"/>
-            </a:lvl1pPr>
-          </a:lstStyle>
-          <a:p>
-            <a:endParaRPr lang="en-US"/>
-          </a:p>
-        </p:txBody>
-      </p:sp>
-      <p:sp>
-        <p:nvSpPr>
-          <p:cNvPr id="7" name="Slide Number Placeholder 6"/>
-          <p:cNvSpPr>
-            <a:spLocks noGrp="1"/>
-          </p:cNvSpPr>
-          <p:nvPr>
-            <p:ph type="sldNum" sz="quarter" idx="5"/>
-          </p:nvPr>
-        </p:nvSpPr>
-        <p:spPr>
-          <a:xfrm>
-            <a:off x="3884613" y="8685213"/>
-            <a:ext cx="2971800" cy="458787"/>
-          </a:xfrm>
-          <a:prstGeom prst="rect">
-            <a:avLst/>
-          </a:prstGeom>
-        </p:spPr>
-        <p:txBody>
-          <a:bodyPr vert="horz" lIns="91440" tIns="45720" rIns="91440" bIns="45720" rtlCol="0" anchor="b"/>
-          <a:lstStyle>
-            <a:lvl1pPr algn="r">
-              <a:defRPr sz="1200"/>
-            </a:lvl1pPr>
-          </a:lstStyle>
-          <a:p>
-            <a:fld id="{CE5E9CC1-C706-0F49-92D6-E571CC5EEA8F}" type="slidenum">
-              <a:rPr lang="en-US"/>
-              <a:t>‹#›</a:t>
-            </a:fld>
-            <a:endParaRPr lang="en-US"/>
-          </a:p>
-        </p:txBody>
-      </p:sp>
     </p:spTree>
     <p:extLst>
       <p:ext uri="{BB962C8B-B14F-4D97-AF65-F5344CB8AC3E}">
-        <p14:creationId xmlns:p14="http://schemas.microsoft.com/office/powerpoint/2010/main" val="1024086991"/>
+        <p14:creationId xmlns:p14="http://schemas.microsoft.com/office/powerpoint/2010/main" val="112930535"/>
       </p:ext>
     </p:extLst>
   </p:cSld>
@@ -517,7 +298,6 @@
 Na Fase 1 entregamos o MVP em Clean Architecture. A Fase 2 pediu duas coisas: evoluir as regras de negócio e entregar a cadeia de infraestrutura inteira — container, Kubernetes, Terraform e CI/CD.
 É isso que vamos mostrar. E vamos mostrar rodando — na AWS.</a:t>
             </a:r>
-            <a:endParaRPr lang="en-US" dirty="0"/>
           </a:p>
         </p:txBody>
       </p:sp>
@@ -613,7 +393,6 @@
 • O passo 7 é a novidade da fase: numa OS separada, o CLIENTE aprova pelo token do e-mail, no endpoint público, SEM login.
 Deixe cliente, veículo, serviço e peça já cadastrados antes de gravar.</a:t>
             </a:r>
-            <a:endParaRPr lang="en-US" dirty="0"/>
           </a:p>
         </p:txBody>
       </p:sp>
@@ -705,7 +484,6 @@
 Depois, o autoscaling: tela dividida com o HPA de um lado e o k6 do outro. Suba a carga e narre o HPA acordando — de &lt;unknown&gt; ao percentual real, passando de 70%, e as réplicas subindo de 2 até 8.
 ATENÇÃO: não prometa que as réplicas voltam a 2 sozinhas. Com a métrica de memória ligada, a JVM não devolve heap e o HPA fica preso no teto. Se quiserem essa fala, o HPA precisa ser ajustado antes.</a:t>
             </a:r>
-            <a:endParaRPr lang="en-US" dirty="0"/>
           </a:p>
         </p:txBody>
       </p:sp>
@@ -794,7 +572,6 @@
               <a:t>Regras novas sem tocar em infraestrutura, porque a arquitetura aguentou. Infraestrutura declarada, versionada e destruível com um clique. E a esteira inteira, do commit ao cluster.
 Obrigado.</a:t>
             </a:r>
-            <a:endParaRPr lang="en-US" dirty="0"/>
           </a:p>
         </p:txBody>
       </p:sp>
@@ -886,7 +663,6 @@
 104 testes, JaCoCo travando o build abaixo de 80% no domínio, OWASP e SonarCloud barrando a main.
 E três débitos técnicos. Não foram esquecimento: foram anotados de propósito, com a justificativa de cada um. Guardem esse detalhe — a Fase 2 fecha os três.</a:t>
             </a:r>
-            <a:endParaRPr lang="en-US" dirty="0"/>
           </a:p>
         </p:txBody>
       </p:sp>
@@ -977,7 +753,6 @@
 Segunda, a infraestrutura inteira: a imagem, o cluster Kubernetes com escalabilidade automática, o Terraform, e a esteira que vai do commit até o deploy.
 Terceira, e é a que fecha o ciclo: os três débitos da Fase 1, quitados. Os mappers manuais dos adapters de persistência saíram — trocamos pela biblioteca MapStruct, que gera esse código de mapeamento no build. O construtor de nove parâmetros virou um record. E a notificação ganhou canal concreto — SMTP de verdade — fechando aquele Hot Spot que estava aberto desde o Event Storming.</a:t>
             </a:r>
-            <a:endParaRPr lang="en-US" dirty="0"/>
           </a:p>
         </p:txBody>
       </p:sp>
@@ -1067,7 +842,6 @@
 O que vai pra produção não tem Maven, não tem código-fonte, não tem cache de build — e roda como usuário não-root, com healthcheck.
 Para o dia a dia, um docker compose up sobe API, Postgres e MailHog.</a:t>
             </a:r>
-            <a:endParaRPr lang="en-US" dirty="0"/>
           </a:p>
         </p:txBody>
       </p:sp>
@@ -1160,7 +934,6 @@
 Requests e limits de CPU e memória. E é por isso que o autoscaling funciona: sem requests, o HPA não tem denominador e não calcula porcentagem nenhuma.
 O metrics-server precisou ser adicionado à mão: nem o kind nem o EKS o trazem, e sem ele o HPA lê &lt;unknown&gt; para sempre.</a:t>
             </a:r>
-            <a:endParaRPr lang="en-US" dirty="0"/>
           </a:p>
         </p:txBody>
       </p:sp>
@@ -1251,7 +1024,6 @@
 O mesmo Terraform sobe um cluster kind local, com Postgres dentro do cluster e custo zero. A diferença entre os dois cenários é só onde está o banco e de onde vem a imagem: o resto é exatamente o mesmo YAML.
 Escolhas de custo mínimo na AWS: sem NAT Gateway, instâncias pequenas, single-AZ. É um ambiente efêmero — subir, demonstrar, destruir.</a:t>
             </a:r>
-            <a:endParaRPr lang="en-US" dirty="0"/>
           </a:p>
         </p:txBody>
       </p:sp>
@@ -1343,7 +1115,6 @@
 Se fosse o próprio Terraform, o primeiro apply — justamente o que cria o bucket — ainda não teria bucket onde guardar o seu state. Ele ficaria em disco. E state em disco morre junto com o runner do CI: na execução seguinte, o Terraform esqueceria que o bucket existe e tentaria criá-lo de novo.
 A causa é tratar um pré-requisito como se fosse um recurso. Então o bucket e a tabela são criados por um script de AWS CLI idempotente, que não tem state nenhum: pode rodar dez vezes, converge sempre no mesmo lugar. E aí ele roda tranquilo num runner efêmero — como o primeiro job da nossa esteira.</a:t>
             </a:r>
-            <a:endParaRPr lang="en-US" dirty="0"/>
           </a:p>
         </p:txBody>
       </p:sp>
@@ -1437,7 +1208,6 @@
 Segunda: o apply não roda direto. O plan é gerado, publicado como artefato, e um GitHub Environment com required reviewers segura a esteira até alguém aprovar. É controle de mudança: separa quem propõe de quem aplica, e o apply usa exatamente o plano que foi revisado.
 Terceira: a imagem é taggeada com o SHA do commit. O que está rodando no cluster é rastreável até a linha de código que o gerou.</a:t>
             </a:r>
-            <a:endParaRPr lang="en-US" dirty="0"/>
           </a:p>
         </p:txBody>
       </p:sp>
@@ -1530,7 +1300,6 @@
 Os conceitos das aulas que isso exercita: Clean Architecture e DDD, containerização, orquestração e escalabilidade, infraestrutura como código, e a cultura DevOps de automatizar tudo que dá — e revisar o que não deve ser automático.
 (Se perguntarem sobre segurança de dependências: OWASP roda a cada push; as CVEs sem patch publicado estão suprimidas com justificativa e data, documentadas no README.)</a:t>
             </a:r>
-            <a:endParaRPr lang="en-US" dirty="0"/>
           </a:p>
         </p:txBody>
       </p:sp>
@@ -1603,6 +1372,11 @@
 <file path=ppt/slideMasters/slideMaster1.xml><?xml version="1.0" encoding="utf-8"?>
 <p:sldMaster xmlns:a="http://schemas.openxmlformats.org/drawingml/2006/main" xmlns:r="http://schemas.openxmlformats.org/officeDocument/2006/relationships" xmlns:p="http://schemas.openxmlformats.org/presentationml/2006/main">
   <p:cSld>
+    <p:bg>
+      <p:bgRef idx="1001">
+        <a:schemeClr val="bg1"/>
+      </p:bgRef>
+    </p:bg>
     <p:spTree>
       <p:nvGrpSpPr>
         <p:cNvPr id="1" name=""/>
@@ -1885,6 +1659,7 @@
         <a:solidFill>
           <a:srgbClr val="F5F2ED"/>
         </a:solidFill>
+        <a:effectLst/>
       </p:bgPr>
     </p:bg>
     <p:spTree>
@@ -1920,6 +1695,13 @@
           </a:solidFill>
           <a:ln/>
         </p:spPr>
+        <p:txBody>
+          <a:bodyPr/>
+          <a:lstStyle/>
+          <a:p>
+            <a:endParaRPr lang="pt-BR"/>
+          </a:p>
+        </p:txBody>
       </p:sp>
       <p:sp>
         <p:nvSpPr>
@@ -1942,7 +1724,7 @@
           <a:bodyPr wrap="square" rtlCol="0" anchor="ctr"/>
           <a:lstStyle/>
           <a:p>
-            <a:pPr indent="0" marL="0">
+            <a:pPr marL="0" indent="0">
               <a:buNone/>
             </a:pPr>
             <a:r>
@@ -1981,7 +1763,7 @@
           <a:bodyPr wrap="square" rtlCol="0" anchor="ctr"/>
           <a:lstStyle/>
           <a:p>
-            <a:pPr indent="0" marL="0">
+            <a:pPr marL="0" indent="0">
               <a:lnSpc>
                 <a:spcPts val="2600"/>
               </a:lnSpc>
@@ -2001,7 +1783,7 @@
             <a:endParaRPr lang="en-US" sz="1600" dirty="0"/>
           </a:p>
           <a:p>
-            <a:pPr indent="0" marL="0">
+            <a:pPr marL="0" indent="0">
               <a:lnSpc>
                 <a:spcPts val="2600"/>
               </a:lnSpc>
@@ -2030,8 +1812,8 @@
         </p:nvSpPr>
         <p:spPr>
           <a:xfrm>
-            <a:off x="822960" y="4206240"/>
-            <a:ext cx="10545775" cy="320040"/>
+            <a:off x="822960" y="3976777"/>
+            <a:ext cx="10545775" cy="549503"/>
           </a:xfrm>
           <a:prstGeom prst="rect">
             <a:avLst/>
@@ -2043,21 +1825,79 @@
           <a:bodyPr wrap="square" rtlCol="0" anchor="ctr"/>
           <a:lstStyle/>
           <a:p>
-            <a:pPr indent="0" marL="0">
-              <a:buNone/>
-            </a:pPr>
-            <a:r>
-              <a:rPr lang="en-US" sz="1300" b="1" dirty="0">
-                <a:solidFill>
-                  <a:srgbClr val="2A2E33"/>
-                </a:solidFill>
-                <a:latin typeface="Segoe UI" pitchFamily="34" charset="0"/>
-                <a:ea typeface="Segoe UI" pitchFamily="34" charset="-122"/>
-                <a:cs typeface="Segoe UI" pitchFamily="34" charset="-120"/>
-              </a:rPr>
-              <a:t>Danilo Canato          Guilherme Fumagali</a:t>
-            </a:r>
-            <a:endParaRPr lang="en-US" sz="1300" dirty="0"/>
+            <a:pPr marL="0" marR="0" indent="0" algn="l" fontAlgn="base">
+              <a:lnSpc>
+                <a:spcPts val="1650"/>
+              </a:lnSpc>
+            </a:pPr>
+            <a:r>
+              <a:rPr lang="pt-BR" sz="1400" b="1" i="0" dirty="0">
+                <a:effectLst/>
+                <a:latin typeface="inherit"/>
+              </a:rPr>
+              <a:t>Danilo Canato — RM 372411 — </a:t>
+            </a:r>
+            <a:r>
+              <a:rPr lang="pt-BR" sz="1400" b="1" i="0" dirty="0" err="1">
+                <a:effectLst/>
+                <a:latin typeface="inherit"/>
+              </a:rPr>
+              <a:t>Discord</a:t>
+            </a:r>
+            <a:r>
+              <a:rPr lang="pt-BR" sz="1400" b="1" i="0" dirty="0">
+                <a:effectLst/>
+                <a:latin typeface="inherit"/>
+              </a:rPr>
+              <a:t>: @canatodanilo </a:t>
+            </a:r>
+            <a:br>
+              <a:rPr lang="pt-BR" sz="1400" b="1" i="0" dirty="0">
+                <a:effectLst/>
+                <a:latin typeface="inherit"/>
+              </a:rPr>
+            </a:br>
+            <a:r>
+              <a:rPr lang="pt-BR" sz="1400" b="1" i="0" dirty="0">
+                <a:effectLst/>
+                <a:latin typeface="inherit"/>
+              </a:rPr>
+              <a:t>Guilherme </a:t>
+            </a:r>
+            <a:r>
+              <a:rPr lang="pt-BR" sz="1400" b="1" i="0" dirty="0" err="1">
+                <a:effectLst/>
+                <a:latin typeface="inherit"/>
+              </a:rPr>
+              <a:t>Fumagali</a:t>
+            </a:r>
+            <a:r>
+              <a:rPr lang="pt-BR" sz="1400" b="1" i="0" dirty="0">
+                <a:effectLst/>
+                <a:latin typeface="inherit"/>
+              </a:rPr>
+              <a:t> Marques — RM 372421 — </a:t>
+            </a:r>
+            <a:r>
+              <a:rPr lang="pt-BR" sz="1400" b="1" i="0" dirty="0" err="1">
+                <a:effectLst/>
+                <a:latin typeface="inherit"/>
+              </a:rPr>
+              <a:t>Discord</a:t>
+            </a:r>
+            <a:r>
+              <a:rPr lang="pt-BR" sz="1400" b="1" i="0" dirty="0">
+                <a:effectLst/>
+                <a:latin typeface="inherit"/>
+              </a:rPr>
+              <a:t>: </a:t>
+            </a:r>
+            <a:r>
+              <a:rPr lang="pt-BR" sz="1400" b="1" dirty="0">
+                <a:latin typeface="inherit"/>
+              </a:rPr>
+              <a:t>@gfumafali</a:t>
+            </a:r>
           </a:p>
         </p:txBody>
       </p:sp>
@@ -2082,7 +1922,7 @@
           <a:bodyPr wrap="square" rtlCol="0" anchor="ctr"/>
           <a:lstStyle/>
           <a:p>
-            <a:pPr indent="0" marL="0">
+            <a:pPr marL="0" indent="0">
               <a:buNone/>
             </a:pPr>
             <a:r>
@@ -2116,6 +1956,7 @@
         <a:solidFill>
           <a:srgbClr val="F5F2ED"/>
         </a:solidFill>
+        <a:effectLst/>
       </p:bgPr>
     </p:bg>
     <p:spTree>
@@ -2151,6 +1992,13 @@
           </a:solidFill>
           <a:ln/>
         </p:spPr>
+        <p:txBody>
+          <a:bodyPr/>
+          <a:lstStyle/>
+          <a:p>
+            <a:endParaRPr lang="pt-BR"/>
+          </a:p>
+        </p:txBody>
       </p:sp>
       <p:sp>
         <p:nvSpPr>
@@ -2173,11 +2021,11 @@
           <a:bodyPr wrap="square" rtlCol="0" anchor="ctr"/>
           <a:lstStyle/>
           <a:p>
-            <a:pPr algn="ctr" indent="0" marL="0">
-              <a:buNone/>
-            </a:pPr>
-            <a:r>
-              <a:rPr lang="en-US" sz="1100" b="1" spc="200" kern="0" dirty="0">
+            <a:pPr marL="0" indent="0" algn="ctr">
+              <a:buNone/>
+            </a:pPr>
+            <a:r>
+              <a:rPr lang="en-US" sz="1100" b="1" kern="0" spc="200" dirty="0">
                 <a:solidFill>
                   <a:srgbClr val="F5F2ED"/>
                 </a:solidFill>
@@ -2212,7 +2060,7 @@
           <a:bodyPr wrap="square" rtlCol="0" anchor="ctr"/>
           <a:lstStyle/>
           <a:p>
-            <a:pPr indent="0" marL="0">
+            <a:pPr marL="0" indent="0">
               <a:buNone/>
             </a:pPr>
             <a:r>
@@ -2251,7 +2099,7 @@
           <a:bodyPr wrap="square" rtlCol="0" anchor="t"/>
           <a:lstStyle/>
           <a:p>
-            <a:pPr algn="l" indent="0" marL="0">
+            <a:pPr marL="0" indent="0" algn="l">
               <a:buNone/>
             </a:pPr>
             <a:r>
@@ -2290,7 +2138,7 @@
           <a:bodyPr wrap="square" rtlCol="0" anchor="t"/>
           <a:lstStyle/>
           <a:p>
-            <a:pPr indent="0" marL="0">
+            <a:pPr marL="0" indent="0">
               <a:lnSpc>
                 <a:spcPts val="2000"/>
               </a:lnSpc>
@@ -2332,7 +2180,7 @@
           <a:bodyPr wrap="square" rtlCol="0" anchor="t"/>
           <a:lstStyle/>
           <a:p>
-            <a:pPr algn="l" indent="0" marL="0">
+            <a:pPr marL="0" indent="0" algn="l">
               <a:buNone/>
             </a:pPr>
             <a:r>
@@ -2371,7 +2219,7 @@
           <a:bodyPr wrap="square" rtlCol="0" anchor="t"/>
           <a:lstStyle/>
           <a:p>
-            <a:pPr indent="0" marL="0">
+            <a:pPr marL="0" indent="0">
               <a:lnSpc>
                 <a:spcPts val="2000"/>
               </a:lnSpc>
@@ -2413,7 +2261,7 @@
           <a:bodyPr wrap="square" rtlCol="0" anchor="t"/>
           <a:lstStyle/>
           <a:p>
-            <a:pPr algn="l" indent="0" marL="0">
+            <a:pPr marL="0" indent="0" algn="l">
               <a:buNone/>
             </a:pPr>
             <a:r>
@@ -2452,7 +2300,7 @@
           <a:bodyPr wrap="square" rtlCol="0" anchor="t"/>
           <a:lstStyle/>
           <a:p>
-            <a:pPr indent="0" marL="0">
+            <a:pPr marL="0" indent="0">
               <a:lnSpc>
                 <a:spcPts val="2000"/>
               </a:lnSpc>
@@ -2494,7 +2342,7 @@
           <a:bodyPr wrap="square" rtlCol="0" anchor="t"/>
           <a:lstStyle/>
           <a:p>
-            <a:pPr algn="l" indent="0" marL="0">
+            <a:pPr marL="0" indent="0" algn="l">
               <a:buNone/>
             </a:pPr>
             <a:r>
@@ -2533,7 +2381,7 @@
           <a:bodyPr wrap="square" rtlCol="0" anchor="t"/>
           <a:lstStyle/>
           <a:p>
-            <a:pPr indent="0" marL="0">
+            <a:pPr marL="0" indent="0">
               <a:lnSpc>
                 <a:spcPts val="2000"/>
               </a:lnSpc>
@@ -2575,7 +2423,7 @@
           <a:bodyPr wrap="square" rtlCol="0" anchor="t"/>
           <a:lstStyle/>
           <a:p>
-            <a:pPr algn="l" indent="0" marL="0">
+            <a:pPr marL="0" indent="0" algn="l">
               <a:buNone/>
             </a:pPr>
             <a:r>
@@ -2614,7 +2462,7 @@
           <a:bodyPr wrap="square" rtlCol="0" anchor="t"/>
           <a:lstStyle/>
           <a:p>
-            <a:pPr indent="0" marL="0">
+            <a:pPr marL="0" indent="0">
               <a:lnSpc>
                 <a:spcPts val="2000"/>
               </a:lnSpc>
@@ -2656,7 +2504,7 @@
           <a:bodyPr wrap="square" rtlCol="0" anchor="t"/>
           <a:lstStyle/>
           <a:p>
-            <a:pPr algn="l" indent="0" marL="0">
+            <a:pPr marL="0" indent="0" algn="l">
               <a:buNone/>
             </a:pPr>
             <a:r>
@@ -2695,7 +2543,7 @@
           <a:bodyPr wrap="square" rtlCol="0" anchor="t"/>
           <a:lstStyle/>
           <a:p>
-            <a:pPr indent="0" marL="0">
+            <a:pPr marL="0" indent="0">
               <a:lnSpc>
                 <a:spcPts val="2000"/>
               </a:lnSpc>
@@ -2737,7 +2585,7 @@
           <a:bodyPr wrap="square" rtlCol="0" anchor="t"/>
           <a:lstStyle/>
           <a:p>
-            <a:pPr algn="l" indent="0" marL="0">
+            <a:pPr marL="0" indent="0" algn="l">
               <a:buNone/>
             </a:pPr>
             <a:r>
@@ -2776,7 +2624,7 @@
           <a:bodyPr wrap="square" rtlCol="0" anchor="t"/>
           <a:lstStyle/>
           <a:p>
-            <a:pPr indent="0" marL="0">
+            <a:pPr marL="0" indent="0">
               <a:lnSpc>
                 <a:spcPts val="2000"/>
               </a:lnSpc>
@@ -2818,7 +2666,7 @@
           <a:bodyPr wrap="square" rtlCol="0" anchor="ctr"/>
           <a:lstStyle/>
           <a:p>
-            <a:pPr indent="0" marL="0">
+            <a:pPr marL="0" indent="0">
               <a:buNone/>
             </a:pPr>
             <a:r>
@@ -2855,6 +2703,13 @@
           </a:solidFill>
           <a:ln/>
         </p:spPr>
+        <p:txBody>
+          <a:bodyPr/>
+          <a:lstStyle/>
+          <a:p>
+            <a:endParaRPr lang="pt-BR"/>
+          </a:p>
+        </p:txBody>
       </p:sp>
       <p:sp>
         <p:nvSpPr>
@@ -2877,7 +2732,7 @@
           <a:bodyPr wrap="square" rtlCol="0" anchor="ctr"/>
           <a:lstStyle/>
           <a:p>
-            <a:pPr algn="r" indent="0" marL="0">
+            <a:pPr marL="0" indent="0" algn="r">
               <a:buNone/>
             </a:pPr>
             <a:r>
@@ -2911,6 +2766,7 @@
         <a:solidFill>
           <a:srgbClr val="F5F2ED"/>
         </a:solidFill>
+        <a:effectLst/>
       </p:bgPr>
     </p:bg>
     <p:spTree>
@@ -2946,6 +2802,13 @@
           </a:solidFill>
           <a:ln/>
         </p:spPr>
+        <p:txBody>
+          <a:bodyPr/>
+          <a:lstStyle/>
+          <a:p>
+            <a:endParaRPr lang="pt-BR"/>
+          </a:p>
+        </p:txBody>
       </p:sp>
       <p:sp>
         <p:nvSpPr>
@@ -2968,11 +2831,11 @@
           <a:bodyPr wrap="square" rtlCol="0" anchor="ctr"/>
           <a:lstStyle/>
           <a:p>
-            <a:pPr algn="ctr" indent="0" marL="0">
-              <a:buNone/>
-            </a:pPr>
-            <a:r>
-              <a:rPr lang="en-US" sz="1100" b="1" spc="200" kern="0" dirty="0">
+            <a:pPr marL="0" indent="0" algn="ctr">
+              <a:buNone/>
+            </a:pPr>
+            <a:r>
+              <a:rPr lang="en-US" sz="1100" b="1" kern="0" spc="200" dirty="0">
                 <a:solidFill>
                   <a:srgbClr val="F5F2ED"/>
                 </a:solidFill>
@@ -3007,7 +2870,7 @@
           <a:bodyPr wrap="square" rtlCol="0" anchor="ctr"/>
           <a:lstStyle/>
           <a:p>
-            <a:pPr indent="0" marL="0">
+            <a:pPr marL="0" indent="0">
               <a:buNone/>
             </a:pPr>
             <a:r>
@@ -3046,7 +2909,7 @@
           <a:bodyPr wrap="square" rtlCol="0" anchor="t"/>
           <a:lstStyle/>
           <a:p>
-            <a:pPr algn="l" indent="0" marL="0">
+            <a:pPr marL="0" indent="0" algn="l">
               <a:buNone/>
             </a:pPr>
             <a:r>
@@ -3085,7 +2948,7 @@
           <a:bodyPr wrap="square" rtlCol="0" anchor="t"/>
           <a:lstStyle/>
           <a:p>
-            <a:pPr indent="0" marL="0">
+            <a:pPr marL="0" indent="0">
               <a:lnSpc>
                 <a:spcPts val="2000"/>
               </a:lnSpc>
@@ -3127,7 +2990,7 @@
           <a:bodyPr wrap="square" rtlCol="0" anchor="t"/>
           <a:lstStyle/>
           <a:p>
-            <a:pPr algn="l" indent="0" marL="0">
+            <a:pPr marL="0" indent="0" algn="l">
               <a:buNone/>
             </a:pPr>
             <a:r>
@@ -3166,7 +3029,7 @@
           <a:bodyPr wrap="square" rtlCol="0" anchor="t"/>
           <a:lstStyle/>
           <a:p>
-            <a:pPr indent="0" marL="0">
+            <a:pPr marL="0" indent="0">
               <a:lnSpc>
                 <a:spcPts val="2000"/>
               </a:lnSpc>
@@ -3208,7 +3071,7 @@
           <a:bodyPr wrap="square" rtlCol="0" anchor="t"/>
           <a:lstStyle/>
           <a:p>
-            <a:pPr algn="l" indent="0" marL="0">
+            <a:pPr marL="0" indent="0" algn="l">
               <a:buNone/>
             </a:pPr>
             <a:r>
@@ -3247,7 +3110,7 @@
           <a:bodyPr wrap="square" rtlCol="0" anchor="t"/>
           <a:lstStyle/>
           <a:p>
-            <a:pPr indent="0" marL="0">
+            <a:pPr marL="0" indent="0">
               <a:lnSpc>
                 <a:spcPts val="2000"/>
               </a:lnSpc>
@@ -3289,7 +3152,7 @@
           <a:bodyPr wrap="square" rtlCol="0" anchor="t"/>
           <a:lstStyle/>
           <a:p>
-            <a:pPr algn="l" indent="0" marL="0">
+            <a:pPr marL="0" indent="0" algn="l">
               <a:buNone/>
             </a:pPr>
             <a:r>
@@ -3328,7 +3191,7 @@
           <a:bodyPr wrap="square" rtlCol="0" anchor="t"/>
           <a:lstStyle/>
           <a:p>
-            <a:pPr indent="0" marL="0">
+            <a:pPr marL="0" indent="0">
               <a:lnSpc>
                 <a:spcPts val="2000"/>
               </a:lnSpc>
@@ -3370,7 +3233,7 @@
           <a:bodyPr wrap="square" rtlCol="0" anchor="t"/>
           <a:lstStyle/>
           <a:p>
-            <a:pPr algn="l" indent="0" marL="0">
+            <a:pPr marL="0" indent="0" algn="l">
               <a:buNone/>
             </a:pPr>
             <a:r>
@@ -3409,7 +3272,7 @@
           <a:bodyPr wrap="square" rtlCol="0" anchor="t"/>
           <a:lstStyle/>
           <a:p>
-            <a:pPr indent="0" marL="0">
+            <a:pPr marL="0" indent="0">
               <a:lnSpc>
                 <a:spcPts val="2000"/>
               </a:lnSpc>
@@ -3451,7 +3314,7 @@
           <a:bodyPr wrap="square" rtlCol="0" anchor="t"/>
           <a:lstStyle/>
           <a:p>
-            <a:pPr algn="l" indent="0" marL="0">
+            <a:pPr marL="0" indent="0" algn="l">
               <a:buNone/>
             </a:pPr>
             <a:r>
@@ -3490,7 +3353,7 @@
           <a:bodyPr wrap="square" rtlCol="0" anchor="t"/>
           <a:lstStyle/>
           <a:p>
-            <a:pPr indent="0" marL="0">
+            <a:pPr marL="0" indent="0">
               <a:lnSpc>
                 <a:spcPts val="2000"/>
               </a:lnSpc>
@@ -3505,7 +3368,7 @@
                 <a:ea typeface="Segoe UI" pitchFamily="34" charset="-122"/>
                 <a:cs typeface="Segoe UI" pitchFamily="34" charset="-120"/>
               </a:rPr>
-              <a:t>As réplicas sobem: 2, 4, 6, 8. Oito é o teto que definimos no manifesto.</a:t>
+              <a:t>As réplicas sobem: 2, 3, 4. Quatro é o teto que definimos no manifesto.</a:t>
             </a:r>
             <a:endParaRPr lang="en-US" sz="1400" dirty="0"/>
           </a:p>
@@ -3530,6 +3393,13 @@
           </a:solidFill>
           <a:ln/>
         </p:spPr>
+        <p:txBody>
+          <a:bodyPr/>
+          <a:lstStyle/>
+          <a:p>
+            <a:endParaRPr lang="pt-BR"/>
+          </a:p>
+        </p:txBody>
       </p:sp>
       <p:sp>
         <p:nvSpPr>
@@ -3552,7 +3422,7 @@
           <a:bodyPr wrap="square" rtlCol="0" anchor="ctr"/>
           <a:lstStyle/>
           <a:p>
-            <a:pPr algn="r" indent="0" marL="0">
+            <a:pPr marL="0" indent="0" algn="r">
               <a:buNone/>
             </a:pPr>
             <a:r>
@@ -3586,6 +3456,7 @@
         <a:solidFill>
           <a:srgbClr val="F5F2ED"/>
         </a:solidFill>
+        <a:effectLst/>
       </p:bgPr>
     </p:bg>
     <p:spTree>
@@ -3621,6 +3492,13 @@
           </a:solidFill>
           <a:ln/>
         </p:spPr>
+        <p:txBody>
+          <a:bodyPr/>
+          <a:lstStyle/>
+          <a:p>
+            <a:endParaRPr lang="pt-BR"/>
+          </a:p>
+        </p:txBody>
       </p:sp>
       <p:sp>
         <p:nvSpPr>
@@ -3643,7 +3521,7 @@
           <a:bodyPr wrap="square" rtlCol="0" anchor="ctr"/>
           <a:lstStyle/>
           <a:p>
-            <a:pPr indent="0" marL="0">
+            <a:pPr marL="0" indent="0">
               <a:buNone/>
             </a:pPr>
             <a:r>
@@ -3680,6 +3558,13 @@
           </a:solidFill>
           <a:ln/>
         </p:spPr>
+        <p:txBody>
+          <a:bodyPr/>
+          <a:lstStyle/>
+          <a:p>
+            <a:endParaRPr lang="pt-BR"/>
+          </a:p>
+        </p:txBody>
       </p:sp>
       <p:sp>
         <p:nvSpPr>
@@ -3702,7 +3587,7 @@
           <a:bodyPr wrap="square" rtlCol="0" anchor="t"/>
           <a:lstStyle/>
           <a:p>
-            <a:pPr indent="0" marL="0">
+            <a:pPr marL="0" indent="0">
               <a:buNone/>
             </a:pPr>
             <a:r>
@@ -3716,9 +3601,6 @@
               </a:rPr>
               <a:t>Regras novas sem tocar em infraestrutura.</a:t>
             </a:r>
-            <a:pPr indent="0" marL="0">
-              <a:buNone/>
-            </a:pPr>
             <a:r>
               <a:rPr lang="en-US" sz="1400" dirty="0">
                 <a:solidFill>
@@ -3753,6 +3635,13 @@
           </a:solidFill>
           <a:ln/>
         </p:spPr>
+        <p:txBody>
+          <a:bodyPr/>
+          <a:lstStyle/>
+          <a:p>
+            <a:endParaRPr lang="pt-BR"/>
+          </a:p>
+        </p:txBody>
       </p:sp>
       <p:sp>
         <p:nvSpPr>
@@ -3775,7 +3664,7 @@
           <a:bodyPr wrap="square" rtlCol="0" anchor="t"/>
           <a:lstStyle/>
           <a:p>
-            <a:pPr indent="0" marL="0">
+            <a:pPr marL="0" indent="0">
               <a:buNone/>
             </a:pPr>
             <a:r>
@@ -3789,9 +3678,6 @@
               </a:rPr>
               <a:t>Infraestrutura declarada e versionada.</a:t>
             </a:r>
-            <a:pPr indent="0" marL="0">
-              <a:buNone/>
-            </a:pPr>
             <a:r>
               <a:rPr lang="en-US" sz="1400" dirty="0">
                 <a:solidFill>
@@ -3826,6 +3712,13 @@
           </a:solidFill>
           <a:ln/>
         </p:spPr>
+        <p:txBody>
+          <a:bodyPr/>
+          <a:lstStyle/>
+          <a:p>
+            <a:endParaRPr lang="pt-BR"/>
+          </a:p>
+        </p:txBody>
       </p:sp>
       <p:sp>
         <p:nvSpPr>
@@ -3848,7 +3741,7 @@
           <a:bodyPr wrap="square" rtlCol="0" anchor="t"/>
           <a:lstStyle/>
           <a:p>
-            <a:pPr indent="0" marL="0">
+            <a:pPr marL="0" indent="0">
               <a:buNone/>
             </a:pPr>
             <a:r>
@@ -3862,9 +3755,6 @@
               </a:rPr>
               <a:t>A esteira inteira.</a:t>
             </a:r>
-            <a:pPr indent="0" marL="0">
-              <a:buNone/>
-            </a:pPr>
             <a:r>
               <a:rPr lang="en-US" sz="1400" dirty="0">
                 <a:solidFill>
@@ -3889,7 +3779,7 @@
         <p:spPr>
           <a:xfrm>
             <a:off x="822960" y="5029200"/>
-            <a:ext cx="10545775" cy="320040"/>
+            <a:ext cx="10545775" cy="629728"/>
           </a:xfrm>
           <a:prstGeom prst="rect">
             <a:avLst/>
@@ -3901,21 +3791,64 @@
           <a:bodyPr wrap="square" rtlCol="0" anchor="ctr"/>
           <a:lstStyle/>
           <a:p>
-            <a:pPr indent="0" marL="0">
-              <a:buNone/>
-            </a:pPr>
-            <a:r>
-              <a:rPr lang="en-US" sz="1300" b="1" dirty="0">
-                <a:solidFill>
-                  <a:srgbClr val="2A2E33"/>
-                </a:solidFill>
-                <a:latin typeface="Segoe UI" pitchFamily="34" charset="0"/>
-                <a:ea typeface="Segoe UI" pitchFamily="34" charset="-122"/>
-                <a:cs typeface="Segoe UI" pitchFamily="34" charset="-120"/>
-              </a:rPr>
-              <a:t>Danilo Canato          Guilherme Fumagali</a:t>
-            </a:r>
-            <a:endParaRPr lang="en-US" sz="1300" dirty="0"/>
+            <a:pPr fontAlgn="base">
+              <a:lnSpc>
+                <a:spcPts val="1650"/>
+              </a:lnSpc>
+            </a:pPr>
+            <a:r>
+              <a:rPr lang="pt-BR" sz="1200" b="1" dirty="0">
+                <a:latin typeface="inherit"/>
+              </a:rPr>
+              <a:t>Danilo Canato — RM 372411 — </a:t>
+            </a:r>
+            <a:r>
+              <a:rPr lang="pt-BR" sz="1200" b="1" dirty="0" err="1">
+                <a:latin typeface="inherit"/>
+              </a:rPr>
+              <a:t>Discord</a:t>
+            </a:r>
+            <a:r>
+              <a:rPr lang="pt-BR" sz="1200" b="1" dirty="0">
+                <a:latin typeface="inherit"/>
+              </a:rPr>
+              <a:t>: @canatodanilo </a:t>
+            </a:r>
+            <a:br>
+              <a:rPr lang="pt-BR" sz="1200" b="1" dirty="0">
+                <a:latin typeface="inherit"/>
+              </a:rPr>
+            </a:br>
+            <a:r>
+              <a:rPr lang="pt-BR" sz="1200" b="1" dirty="0">
+                <a:latin typeface="inherit"/>
+              </a:rPr>
+              <a:t>Guilherme </a:t>
+            </a:r>
+            <a:r>
+              <a:rPr lang="pt-BR" sz="1200" b="1" dirty="0" err="1">
+                <a:latin typeface="inherit"/>
+              </a:rPr>
+              <a:t>Fumagali</a:t>
+            </a:r>
+            <a:r>
+              <a:rPr lang="pt-BR" sz="1200" b="1" dirty="0">
+                <a:latin typeface="inherit"/>
+              </a:rPr>
+              <a:t> Marques — RM 372421 — </a:t>
+            </a:r>
+            <a:r>
+              <a:rPr lang="pt-BR" sz="1200" b="1" dirty="0" err="1">
+                <a:latin typeface="inherit"/>
+              </a:rPr>
+              <a:t>Discord</a:t>
+            </a:r>
+            <a:r>
+              <a:rPr lang="pt-BR" sz="1200" b="1" dirty="0">
+                <a:latin typeface="inherit"/>
+              </a:rPr>
+              <a:t>: @gfumafali</a:t>
+            </a:r>
           </a:p>
         </p:txBody>
       </p:sp>
@@ -3935,6 +3868,7 @@
         <a:solidFill>
           <a:srgbClr val="F5F2ED"/>
         </a:solidFill>
+        <a:effectLst/>
       </p:bgPr>
     </p:bg>
     <p:spTree>
@@ -3972,7 +3906,7 @@
           <a:bodyPr wrap="square" rtlCol="0" anchor="b"/>
           <a:lstStyle/>
           <a:p>
-            <a:pPr indent="0" marL="0">
+            <a:pPr marL="0" indent="0">
               <a:buNone/>
             </a:pPr>
             <a:r>
@@ -4009,6 +3943,13 @@
           </a:solidFill>
           <a:ln/>
         </p:spPr>
+        <p:txBody>
+          <a:bodyPr/>
+          <a:lstStyle/>
+          <a:p>
+            <a:endParaRPr lang="pt-BR"/>
+          </a:p>
+        </p:txBody>
       </p:sp>
       <p:sp>
         <p:nvSpPr>
@@ -4031,7 +3972,7 @@
           <a:bodyPr wrap="square" rtlCol="0" anchor="t"/>
           <a:lstStyle/>
           <a:p>
-            <a:pPr indent="0" marL="0">
+            <a:pPr marL="0" indent="0">
               <a:lnSpc>
                 <a:spcPts val="2400"/>
               </a:lnSpc>
@@ -4071,6 +4012,13 @@
           </a:solidFill>
           <a:ln/>
         </p:spPr>
+        <p:txBody>
+          <a:bodyPr/>
+          <a:lstStyle/>
+          <a:p>
+            <a:endParaRPr lang="pt-BR"/>
+          </a:p>
+        </p:txBody>
       </p:sp>
       <p:sp>
         <p:nvSpPr>
@@ -4093,11 +4041,11 @@
           <a:bodyPr wrap="square" rtlCol="0" anchor="ctr"/>
           <a:lstStyle/>
           <a:p>
-            <a:pPr indent="0" marL="0">
-              <a:buNone/>
-            </a:pPr>
-            <a:r>
-              <a:rPr lang="en-US" sz="950" b="1" spc="140" kern="0" dirty="0">
+            <a:pPr marL="0" indent="0">
+              <a:buNone/>
+            </a:pPr>
+            <a:r>
+              <a:rPr lang="en-US" sz="950" b="1" kern="0" spc="140" dirty="0">
                 <a:solidFill>
                   <a:srgbClr val="767E86"/>
                 </a:solidFill>
@@ -4132,7 +4080,7 @@
           <a:bodyPr wrap="square" rtlCol="0" anchor="t"/>
           <a:lstStyle/>
           <a:p>
-            <a:pPr indent="0" marL="0">
+            <a:pPr marL="0" indent="0">
               <a:lnSpc>
                 <a:spcPts val="2200"/>
               </a:lnSpc>
@@ -4174,7 +4122,7 @@
           <a:bodyPr wrap="square" rtlCol="0" anchor="t"/>
           <a:lstStyle/>
           <a:p>
-            <a:pPr indent="0" marL="0">
+            <a:pPr marL="0" indent="0">
               <a:lnSpc>
                 <a:spcPts val="1900"/>
               </a:lnSpc>
@@ -4214,6 +4162,13 @@
           </a:solidFill>
           <a:ln/>
         </p:spPr>
+        <p:txBody>
+          <a:bodyPr/>
+          <a:lstStyle/>
+          <a:p>
+            <a:endParaRPr lang="pt-BR"/>
+          </a:p>
+        </p:txBody>
       </p:sp>
       <p:sp>
         <p:nvSpPr>
@@ -4236,11 +4191,11 @@
           <a:bodyPr wrap="square" rtlCol="0" anchor="ctr"/>
           <a:lstStyle/>
           <a:p>
-            <a:pPr indent="0" marL="0">
-              <a:buNone/>
-            </a:pPr>
-            <a:r>
-              <a:rPr lang="en-US" sz="950" b="1" spc="140" kern="0" dirty="0">
+            <a:pPr marL="0" indent="0">
+              <a:buNone/>
+            </a:pPr>
+            <a:r>
+              <a:rPr lang="en-US" sz="950" b="1" kern="0" spc="140" dirty="0">
                 <a:solidFill>
                   <a:srgbClr val="767E86"/>
                 </a:solidFill>
@@ -4275,7 +4230,7 @@
           <a:bodyPr wrap="square" rtlCol="0" anchor="t"/>
           <a:lstStyle/>
           <a:p>
-            <a:pPr indent="0" marL="0">
+            <a:pPr marL="0" indent="0">
               <a:lnSpc>
                 <a:spcPts val="2200"/>
               </a:lnSpc>
@@ -4317,7 +4272,7 @@
           <a:bodyPr wrap="square" rtlCol="0" anchor="t"/>
           <a:lstStyle/>
           <a:p>
-            <a:pPr indent="0" marL="0">
+            <a:pPr marL="0" indent="0">
               <a:lnSpc>
                 <a:spcPts val="1900"/>
               </a:lnSpc>
@@ -4357,6 +4312,13 @@
           </a:solidFill>
           <a:ln/>
         </p:spPr>
+        <p:txBody>
+          <a:bodyPr/>
+          <a:lstStyle/>
+          <a:p>
+            <a:endParaRPr lang="pt-BR"/>
+          </a:p>
+        </p:txBody>
       </p:sp>
       <p:sp>
         <p:nvSpPr>
@@ -4379,11 +4341,11 @@
           <a:bodyPr wrap="square" rtlCol="0" anchor="ctr"/>
           <a:lstStyle/>
           <a:p>
-            <a:pPr indent="0" marL="0">
-              <a:buNone/>
-            </a:pPr>
-            <a:r>
-              <a:rPr lang="en-US" sz="950" b="1" spc="140" kern="0" dirty="0">
+            <a:pPr marL="0" indent="0">
+              <a:buNone/>
+            </a:pPr>
+            <a:r>
+              <a:rPr lang="en-US" sz="950" b="1" kern="0" spc="140" dirty="0">
                 <a:solidFill>
                   <a:srgbClr val="767E86"/>
                 </a:solidFill>
@@ -4418,7 +4380,7 @@
           <a:bodyPr wrap="square" rtlCol="0" anchor="t"/>
           <a:lstStyle/>
           <a:p>
-            <a:pPr indent="0" marL="0">
+            <a:pPr marL="0" indent="0">
               <a:lnSpc>
                 <a:spcPts val="2200"/>
               </a:lnSpc>
@@ -4460,7 +4422,7 @@
           <a:bodyPr wrap="square" rtlCol="0" anchor="t"/>
           <a:lstStyle/>
           <a:p>
-            <a:pPr indent="0" marL="0">
+            <a:pPr marL="0" indent="0">
               <a:lnSpc>
                 <a:spcPts val="1900"/>
               </a:lnSpc>
@@ -4500,6 +4462,13 @@
           </a:solidFill>
           <a:ln/>
         </p:spPr>
+        <p:txBody>
+          <a:bodyPr/>
+          <a:lstStyle/>
+          <a:p>
+            <a:endParaRPr lang="pt-BR"/>
+          </a:p>
+        </p:txBody>
       </p:sp>
       <p:sp>
         <p:nvSpPr>
@@ -4522,7 +4491,7 @@
           <a:bodyPr wrap="square" rtlCol="0" anchor="t"/>
           <a:lstStyle/>
           <a:p>
-            <a:pPr indent="0" marL="0">
+            <a:pPr marL="0" indent="0">
               <a:lnSpc>
                 <a:spcPts val="2200"/>
               </a:lnSpc>
@@ -4539,12 +4508,6 @@
               </a:rPr>
               <a:t>E três débitos técnicos:</a:t>
             </a:r>
-            <a:pPr indent="0" marL="0">
-              <a:lnSpc>
-                <a:spcPts val="2200"/>
-              </a:lnSpc>
-              <a:buNone/>
-            </a:pPr>
             <a:r>
               <a:rPr lang="en-US" sz="1400" dirty="0">
                 <a:solidFill>
@@ -4579,6 +4542,13 @@
           </a:solidFill>
           <a:ln/>
         </p:spPr>
+        <p:txBody>
+          <a:bodyPr/>
+          <a:lstStyle/>
+          <a:p>
+            <a:endParaRPr lang="pt-BR"/>
+          </a:p>
+        </p:txBody>
       </p:sp>
       <p:sp>
         <p:nvSpPr>
@@ -4601,7 +4571,7 @@
           <a:bodyPr wrap="square" rtlCol="0" anchor="ctr"/>
           <a:lstStyle/>
           <a:p>
-            <a:pPr algn="r" indent="0" marL="0">
+            <a:pPr marL="0" indent="0" algn="r">
               <a:buNone/>
             </a:pPr>
             <a:r>
@@ -4635,6 +4605,7 @@
         <a:solidFill>
           <a:srgbClr val="F5F2ED"/>
         </a:solidFill>
+        <a:effectLst/>
       </p:bgPr>
     </p:bg>
     <p:spTree>
@@ -4672,7 +4643,7 @@
           <a:bodyPr wrap="square" rtlCol="0" anchor="b"/>
           <a:lstStyle/>
           <a:p>
-            <a:pPr indent="0" marL="0">
+            <a:pPr marL="0" indent="0">
               <a:buNone/>
             </a:pPr>
             <a:r>
@@ -4709,6 +4680,13 @@
           </a:solidFill>
           <a:ln/>
         </p:spPr>
+        <p:txBody>
+          <a:bodyPr/>
+          <a:lstStyle/>
+          <a:p>
+            <a:endParaRPr lang="pt-BR"/>
+          </a:p>
+        </p:txBody>
       </p:sp>
       <p:sp>
         <p:nvSpPr>
@@ -4731,7 +4709,7 @@
           <a:bodyPr wrap="square" rtlCol="0" anchor="t"/>
           <a:lstStyle/>
           <a:p>
-            <a:pPr indent="0" marL="0">
+            <a:pPr marL="0" indent="0">
               <a:lnSpc>
                 <a:spcPts val="2400"/>
               </a:lnSpc>
@@ -4771,6 +4749,13 @@
           </a:solidFill>
           <a:ln/>
         </p:spPr>
+        <p:txBody>
+          <a:bodyPr/>
+          <a:lstStyle/>
+          <a:p>
+            <a:endParaRPr lang="pt-BR"/>
+          </a:p>
+        </p:txBody>
       </p:sp>
       <p:sp>
         <p:nvSpPr>
@@ -4793,11 +4778,11 @@
           <a:bodyPr wrap="square" rtlCol="0" anchor="ctr"/>
           <a:lstStyle/>
           <a:p>
-            <a:pPr indent="0" marL="0">
-              <a:buNone/>
-            </a:pPr>
-            <a:r>
-              <a:rPr lang="en-US" sz="950" b="1" spc="140" kern="0" dirty="0">
+            <a:pPr marL="0" indent="0">
+              <a:buNone/>
+            </a:pPr>
+            <a:r>
+              <a:rPr lang="en-US" sz="950" b="1" kern="0" spc="140" dirty="0">
                 <a:solidFill>
                   <a:srgbClr val="767E86"/>
                 </a:solidFill>
@@ -4832,7 +4817,7 @@
           <a:bodyPr wrap="square" rtlCol="0" anchor="t"/>
           <a:lstStyle/>
           <a:p>
-            <a:pPr indent="0" marL="0">
+            <a:pPr marL="0" indent="0">
               <a:lnSpc>
                 <a:spcPts val="2200"/>
               </a:lnSpc>
@@ -4874,7 +4859,7 @@
           <a:bodyPr wrap="square" rtlCol="0" anchor="t"/>
           <a:lstStyle/>
           <a:p>
-            <a:pPr indent="0" marL="0">
+            <a:pPr marL="0" indent="0">
               <a:lnSpc>
                 <a:spcPts val="1900"/>
               </a:lnSpc>
@@ -4914,6 +4899,13 @@
           </a:solidFill>
           <a:ln/>
         </p:spPr>
+        <p:txBody>
+          <a:bodyPr/>
+          <a:lstStyle/>
+          <a:p>
+            <a:endParaRPr lang="pt-BR"/>
+          </a:p>
+        </p:txBody>
       </p:sp>
       <p:sp>
         <p:nvSpPr>
@@ -4936,11 +4928,11 @@
           <a:bodyPr wrap="square" rtlCol="0" anchor="ctr"/>
           <a:lstStyle/>
           <a:p>
-            <a:pPr indent="0" marL="0">
-              <a:buNone/>
-            </a:pPr>
-            <a:r>
-              <a:rPr lang="en-US" sz="950" b="1" spc="140" kern="0" dirty="0">
+            <a:pPr marL="0" indent="0">
+              <a:buNone/>
+            </a:pPr>
+            <a:r>
+              <a:rPr lang="en-US" sz="950" b="1" kern="0" spc="140" dirty="0">
                 <a:solidFill>
                   <a:srgbClr val="767E86"/>
                 </a:solidFill>
@@ -4975,7 +4967,7 @@
           <a:bodyPr wrap="square" rtlCol="0" anchor="t"/>
           <a:lstStyle/>
           <a:p>
-            <a:pPr indent="0" marL="0">
+            <a:pPr marL="0" indent="0">
               <a:lnSpc>
                 <a:spcPts val="2200"/>
               </a:lnSpc>
@@ -5017,7 +5009,7 @@
           <a:bodyPr wrap="square" rtlCol="0" anchor="t"/>
           <a:lstStyle/>
           <a:p>
-            <a:pPr indent="0" marL="0">
+            <a:pPr marL="0" indent="0">
               <a:lnSpc>
                 <a:spcPts val="1900"/>
               </a:lnSpc>
@@ -5057,6 +5049,13 @@
           </a:solidFill>
           <a:ln/>
         </p:spPr>
+        <p:txBody>
+          <a:bodyPr/>
+          <a:lstStyle/>
+          <a:p>
+            <a:endParaRPr lang="pt-BR"/>
+          </a:p>
+        </p:txBody>
       </p:sp>
       <p:sp>
         <p:nvSpPr>
@@ -5079,11 +5078,11 @@
           <a:bodyPr wrap="square" rtlCol="0" anchor="ctr"/>
           <a:lstStyle/>
           <a:p>
-            <a:pPr indent="0" marL="0">
-              <a:buNone/>
-            </a:pPr>
-            <a:r>
-              <a:rPr lang="en-US" sz="950" b="1" spc="140" kern="0" dirty="0">
+            <a:pPr marL="0" indent="0">
+              <a:buNone/>
+            </a:pPr>
+            <a:r>
+              <a:rPr lang="en-US" sz="950" b="1" kern="0" spc="140" dirty="0">
                 <a:solidFill>
                   <a:srgbClr val="767E86"/>
                 </a:solidFill>
@@ -5118,7 +5117,7 @@
           <a:bodyPr wrap="square" rtlCol="0" anchor="t"/>
           <a:lstStyle/>
           <a:p>
-            <a:pPr indent="0" marL="0">
+            <a:pPr marL="0" indent="0">
               <a:lnSpc>
                 <a:spcPts val="2200"/>
               </a:lnSpc>
@@ -5160,7 +5159,7 @@
           <a:bodyPr wrap="square" rtlCol="0" anchor="t"/>
           <a:lstStyle/>
           <a:p>
-            <a:pPr indent="0" marL="0">
+            <a:pPr marL="0" indent="0">
               <a:lnSpc>
                 <a:spcPts val="1900"/>
               </a:lnSpc>
@@ -5200,6 +5199,13 @@
           </a:solidFill>
           <a:ln/>
         </p:spPr>
+        <p:txBody>
+          <a:bodyPr/>
+          <a:lstStyle/>
+          <a:p>
+            <a:endParaRPr lang="pt-BR"/>
+          </a:p>
+        </p:txBody>
       </p:sp>
       <p:sp>
         <p:nvSpPr>
@@ -5222,7 +5228,7 @@
           <a:bodyPr wrap="square" rtlCol="0" anchor="ctr"/>
           <a:lstStyle/>
           <a:p>
-            <a:pPr algn="r" indent="0" marL="0">
+            <a:pPr marL="0" indent="0" algn="r">
               <a:buNone/>
             </a:pPr>
             <a:r>
@@ -5256,6 +5262,7 @@
         <a:solidFill>
           <a:srgbClr val="F5F2ED"/>
         </a:solidFill>
+        <a:effectLst/>
       </p:bgPr>
     </p:bg>
     <p:spTree>
@@ -5293,7 +5300,7 @@
           <a:bodyPr wrap="square" rtlCol="0" anchor="b"/>
           <a:lstStyle/>
           <a:p>
-            <a:pPr indent="0" marL="0">
+            <a:pPr marL="0" indent="0">
               <a:buNone/>
             </a:pPr>
             <a:r>
@@ -5330,6 +5337,13 @@
           </a:solidFill>
           <a:ln/>
         </p:spPr>
+        <p:txBody>
+          <a:bodyPr/>
+          <a:lstStyle/>
+          <a:p>
+            <a:endParaRPr lang="pt-BR"/>
+          </a:p>
+        </p:txBody>
       </p:sp>
       <p:sp>
         <p:nvSpPr>
@@ -5352,7 +5366,7 @@
           <a:bodyPr wrap="square" rtlCol="0" anchor="t"/>
           <a:lstStyle/>
           <a:p>
-            <a:pPr indent="0" marL="0">
+            <a:pPr marL="0" indent="0">
               <a:lnSpc>
                 <a:spcPts val="2400"/>
               </a:lnSpc>
@@ -5392,6 +5406,13 @@
           </a:solidFill>
           <a:ln/>
         </p:spPr>
+        <p:txBody>
+          <a:bodyPr/>
+          <a:lstStyle/>
+          <a:p>
+            <a:endParaRPr lang="pt-BR"/>
+          </a:p>
+        </p:txBody>
       </p:sp>
       <p:sp>
         <p:nvSpPr>
@@ -5412,6 +5433,13 @@
           </a:solidFill>
           <a:ln/>
         </p:spPr>
+        <p:txBody>
+          <a:bodyPr/>
+          <a:lstStyle/>
+          <a:p>
+            <a:endParaRPr lang="pt-BR"/>
+          </a:p>
+        </p:txBody>
       </p:sp>
       <p:sp>
         <p:nvSpPr>
@@ -5434,7 +5462,7 @@
           <a:bodyPr wrap="square" rtlCol="0" anchor="t"/>
           <a:lstStyle/>
           <a:p>
-            <a:pPr indent="0" marL="0">
+            <a:pPr marL="0" indent="0">
               <a:lnSpc>
                 <a:spcPts val="1800"/>
               </a:lnSpc>
@@ -5454,7 +5482,7 @@
             <a:endParaRPr lang="en-US" sz="1100" dirty="0"/>
           </a:p>
           <a:p>
-            <a:pPr indent="0" marL="0">
+            <a:pPr marL="0" indent="0">
               <a:lnSpc>
                 <a:spcPts val="1800"/>
               </a:lnSpc>
@@ -5474,7 +5502,7 @@
             <a:endParaRPr lang="en-US" sz="1100" dirty="0"/>
           </a:p>
           <a:p>
-            <a:pPr indent="0" marL="0">
+            <a:pPr marL="0" indent="0">
               <a:lnSpc>
                 <a:spcPts val="1800"/>
               </a:lnSpc>
@@ -5494,7 +5522,7 @@
             <a:endParaRPr lang="en-US" sz="1100" dirty="0"/>
           </a:p>
           <a:p>
-            <a:pPr indent="0" marL="0">
+            <a:pPr marL="0" indent="0">
               <a:lnSpc>
                 <a:spcPts val="1800"/>
               </a:lnSpc>
@@ -5503,7 +5531,7 @@
             <a:endParaRPr lang="en-US" sz="1100" dirty="0"/>
           </a:p>
           <a:p>
-            <a:pPr indent="0" marL="0">
+            <a:pPr marL="0" indent="0">
               <a:lnSpc>
                 <a:spcPts val="1800"/>
               </a:lnSpc>
@@ -5523,7 +5551,7 @@
             <a:endParaRPr lang="en-US" sz="1100" dirty="0"/>
           </a:p>
           <a:p>
-            <a:pPr indent="0" marL="0">
+            <a:pPr marL="0" indent="0">
               <a:lnSpc>
                 <a:spcPts val="1800"/>
               </a:lnSpc>
@@ -5543,7 +5571,7 @@
             <a:endParaRPr lang="en-US" sz="1100" dirty="0"/>
           </a:p>
           <a:p>
-            <a:pPr indent="0" marL="0">
+            <a:pPr marL="0" indent="0">
               <a:lnSpc>
                 <a:spcPts val="1800"/>
               </a:lnSpc>
@@ -5563,7 +5591,7 @@
             <a:endParaRPr lang="en-US" sz="1100" dirty="0"/>
           </a:p>
           <a:p>
-            <a:pPr indent="0" marL="0">
+            <a:pPr marL="0" indent="0">
               <a:lnSpc>
                 <a:spcPts val="1800"/>
               </a:lnSpc>
@@ -5583,7 +5611,7 @@
             <a:endParaRPr lang="en-US" sz="1100" dirty="0"/>
           </a:p>
           <a:p>
-            <a:pPr indent="0" marL="0">
+            <a:pPr marL="0" indent="0">
               <a:lnSpc>
                 <a:spcPts val="1800"/>
               </a:lnSpc>
@@ -5603,7 +5631,7 @@
             <a:endParaRPr lang="en-US" sz="1100" dirty="0"/>
           </a:p>
           <a:p>
-            <a:pPr indent="0" marL="0">
+            <a:pPr marL="0" indent="0">
               <a:lnSpc>
                 <a:spcPts val="1800"/>
               </a:lnSpc>
@@ -5643,6 +5671,13 @@
           </a:solidFill>
           <a:ln/>
         </p:spPr>
+        <p:txBody>
+          <a:bodyPr/>
+          <a:lstStyle/>
+          <a:p>
+            <a:endParaRPr lang="pt-BR"/>
+          </a:p>
+        </p:txBody>
       </p:sp>
       <p:sp>
         <p:nvSpPr>
@@ -5665,7 +5700,7 @@
           <a:bodyPr wrap="square" rtlCol="0" anchor="t"/>
           <a:lstStyle/>
           <a:p>
-            <a:pPr indent="0" marL="0">
+            <a:pPr marL="0" indent="0">
               <a:lnSpc>
                 <a:spcPts val="2000"/>
               </a:lnSpc>
@@ -5682,22 +5717,96 @@
               </a:rPr>
               <a:t>Sem Maven, sem fonte, sem cache.</a:t>
             </a:r>
-            <a:pPr indent="0" marL="0">
+            <a:r>
+              <a:rPr lang="en-US" sz="1300" dirty="0">
+                <a:solidFill>
+                  <a:srgbClr val="767E86"/>
+                </a:solidFill>
+                <a:latin typeface="Segoe UI" pitchFamily="34" charset="0"/>
+                <a:ea typeface="Segoe UI" pitchFamily="34" charset="-122"/>
+                <a:cs typeface="Segoe UI" pitchFamily="34" charset="-120"/>
+              </a:rPr>
+              <a:t>  A imagem final tem só o JRE e o JAR.</a:t>
+            </a:r>
+            <a:endParaRPr lang="en-US" sz="1300" dirty="0"/>
+          </a:p>
+        </p:txBody>
+      </p:sp>
+      <p:sp>
+        <p:nvSpPr>
+          <p:cNvPr id="11" name="Shape 8"/>
+          <p:cNvSpPr/>
+          <p:nvPr/>
+        </p:nvSpPr>
+        <p:spPr>
+          <a:xfrm>
+            <a:off x="7223760" y="3749040"/>
+            <a:ext cx="91440" cy="91440"/>
+          </a:xfrm>
+          <a:prstGeom prst="rect">
+            <a:avLst/>
+          </a:prstGeom>
+          <a:solidFill>
+            <a:srgbClr val="1E6E63"/>
+          </a:solidFill>
+          <a:ln/>
+        </p:spPr>
+        <p:txBody>
+          <a:bodyPr/>
+          <a:lstStyle/>
+          <a:p>
+            <a:endParaRPr lang="pt-BR"/>
+          </a:p>
+        </p:txBody>
+      </p:sp>
+      <p:sp>
+        <p:nvSpPr>
+          <p:cNvPr id="12" name="Text 9"/>
+          <p:cNvSpPr/>
+          <p:nvPr/>
+        </p:nvSpPr>
+        <p:spPr>
+          <a:xfrm>
+            <a:off x="7479792" y="3611880"/>
+            <a:ext cx="3870655" cy="777240"/>
+          </a:xfrm>
+          <a:prstGeom prst="rect">
+            <a:avLst/>
+          </a:prstGeom>
+          <a:noFill/>
+          <a:ln/>
+        </p:spPr>
+        <p:txBody>
+          <a:bodyPr wrap="square" rtlCol="0" anchor="t"/>
+          <a:lstStyle/>
+          <a:p>
+            <a:pPr marL="0" indent="0">
               <a:lnSpc>
                 <a:spcPts val="2000"/>
               </a:lnSpc>
               <a:buNone/>
             </a:pPr>
             <a:r>
-              <a:rPr lang="en-US" sz="1300" dirty="0">
-                <a:solidFill>
-                  <a:srgbClr val="767E86"/>
+              <a:rPr lang="en-US" sz="1300" b="1" dirty="0">
+                <a:solidFill>
+                  <a:srgbClr val="2A2E33"/>
                 </a:solidFill>
                 <a:latin typeface="Segoe UI" pitchFamily="34" charset="0"/>
                 <a:ea typeface="Segoe UI" pitchFamily="34" charset="-122"/>
                 <a:cs typeface="Segoe UI" pitchFamily="34" charset="-120"/>
               </a:rPr>
-              <a:t>  A imagem final tem só o JRE e o JAR.</a:t>
+              <a:t>Usuário não-root.</a:t>
+            </a:r>
+            <a:r>
+              <a:rPr lang="en-US" sz="1300" dirty="0">
+                <a:solidFill>
+                  <a:srgbClr val="767E86"/>
+                </a:solidFill>
+                <a:latin typeface="Segoe UI" pitchFamily="34" charset="0"/>
+                <a:ea typeface="Segoe UI" pitchFamily="34" charset="-122"/>
+                <a:cs typeface="Segoe UI" pitchFamily="34" charset="-120"/>
+              </a:rPr>
+              <a:t>  E um healthcheck declarado no próprio container.</a:t>
             </a:r>
             <a:endParaRPr lang="en-US" sz="1300" dirty="0"/>
           </a:p>
@@ -5705,13 +5814,13 @@
       </p:sp>
       <p:sp>
         <p:nvSpPr>
-          <p:cNvPr id="11" name="Shape 8"/>
-          <p:cNvSpPr/>
-          <p:nvPr/>
-        </p:nvSpPr>
-        <p:spPr>
-          <a:xfrm>
-            <a:off x="7223760" y="3749040"/>
+          <p:cNvPr id="13" name="Shape 10"/>
+          <p:cNvSpPr/>
+          <p:nvPr/>
+        </p:nvSpPr>
+        <p:spPr>
+          <a:xfrm>
+            <a:off x="7223760" y="4617720"/>
             <a:ext cx="91440" cy="91440"/>
           </a:xfrm>
           <a:prstGeom prst="rect">
@@ -5722,16 +5831,23 @@
           </a:solidFill>
           <a:ln/>
         </p:spPr>
-      </p:sp>
-      <p:sp>
-        <p:nvSpPr>
-          <p:cNvPr id="12" name="Text 9"/>
-          <p:cNvSpPr/>
-          <p:nvPr/>
-        </p:nvSpPr>
-        <p:spPr>
-          <a:xfrm>
-            <a:off x="7479792" y="3611880"/>
+        <p:txBody>
+          <a:bodyPr/>
+          <a:lstStyle/>
+          <a:p>
+            <a:endParaRPr lang="pt-BR"/>
+          </a:p>
+        </p:txBody>
+      </p:sp>
+      <p:sp>
+        <p:nvSpPr>
+          <p:cNvPr id="14" name="Text 11"/>
+          <p:cNvSpPr/>
+          <p:nvPr/>
+        </p:nvSpPr>
+        <p:spPr>
+          <a:xfrm>
+            <a:off x="7479792" y="4480560"/>
             <a:ext cx="3870655" cy="777240"/>
           </a:xfrm>
           <a:prstGeom prst="rect">
@@ -5744,7 +5860,7 @@
           <a:bodyPr wrap="square" rtlCol="0" anchor="t"/>
           <a:lstStyle/>
           <a:p>
-            <a:pPr indent="0" marL="0">
+            <a:pPr marL="0" indent="0">
               <a:lnSpc>
                 <a:spcPts val="2000"/>
               </a:lnSpc>
@@ -5759,14 +5875,8 @@
                 <a:ea typeface="Segoe UI" pitchFamily="34" charset="-122"/>
                 <a:cs typeface="Segoe UI" pitchFamily="34" charset="-120"/>
               </a:rPr>
-              <a:t>Usuário não-root.</a:t>
-            </a:r>
-            <a:pPr indent="0" marL="0">
-              <a:lnSpc>
-                <a:spcPts val="2000"/>
-              </a:lnSpc>
-              <a:buNone/>
-            </a:pPr>
+              <a:t>Serviços separados.</a:t>
+            </a:r>
             <a:r>
               <a:rPr lang="en-US" sz="1300" dirty="0">
                 <a:solidFill>
@@ -5776,85 +5886,6 @@
                 <a:ea typeface="Segoe UI" pitchFamily="34" charset="-122"/>
                 <a:cs typeface="Segoe UI" pitchFamily="34" charset="-120"/>
               </a:rPr>
-              <a:t>  E um healthcheck declarado no próprio container.</a:t>
-            </a:r>
-            <a:endParaRPr lang="en-US" sz="1300" dirty="0"/>
-          </a:p>
-        </p:txBody>
-      </p:sp>
-      <p:sp>
-        <p:nvSpPr>
-          <p:cNvPr id="13" name="Shape 10"/>
-          <p:cNvSpPr/>
-          <p:nvPr/>
-        </p:nvSpPr>
-        <p:spPr>
-          <a:xfrm>
-            <a:off x="7223760" y="4617720"/>
-            <a:ext cx="91440" cy="91440"/>
-          </a:xfrm>
-          <a:prstGeom prst="rect">
-            <a:avLst/>
-          </a:prstGeom>
-          <a:solidFill>
-            <a:srgbClr val="1E6E63"/>
-          </a:solidFill>
-          <a:ln/>
-        </p:spPr>
-      </p:sp>
-      <p:sp>
-        <p:nvSpPr>
-          <p:cNvPr id="14" name="Text 11"/>
-          <p:cNvSpPr/>
-          <p:nvPr/>
-        </p:nvSpPr>
-        <p:spPr>
-          <a:xfrm>
-            <a:off x="7479792" y="4480560"/>
-            <a:ext cx="3870655" cy="777240"/>
-          </a:xfrm>
-          <a:prstGeom prst="rect">
-            <a:avLst/>
-          </a:prstGeom>
-          <a:noFill/>
-          <a:ln/>
-        </p:spPr>
-        <p:txBody>
-          <a:bodyPr wrap="square" rtlCol="0" anchor="t"/>
-          <a:lstStyle/>
-          <a:p>
-            <a:pPr indent="0" marL="0">
-              <a:lnSpc>
-                <a:spcPts val="2000"/>
-              </a:lnSpc>
-              <a:buNone/>
-            </a:pPr>
-            <a:r>
-              <a:rPr lang="en-US" sz="1300" b="1" dirty="0">
-                <a:solidFill>
-                  <a:srgbClr val="2A2E33"/>
-                </a:solidFill>
-                <a:latin typeface="Segoe UI" pitchFamily="34" charset="0"/>
-                <a:ea typeface="Segoe UI" pitchFamily="34" charset="-122"/>
-                <a:cs typeface="Segoe UI" pitchFamily="34" charset="-120"/>
-              </a:rPr>
-              <a:t>Serviços separados.</a:t>
-            </a:r>
-            <a:pPr indent="0" marL="0">
-              <a:lnSpc>
-                <a:spcPts val="2000"/>
-              </a:lnSpc>
-              <a:buNone/>
-            </a:pPr>
-            <a:r>
-              <a:rPr lang="en-US" sz="1300" dirty="0">
-                <a:solidFill>
-                  <a:srgbClr val="767E86"/>
-                </a:solidFill>
-                <a:latin typeface="Segoe UI" pitchFamily="34" charset="0"/>
-                <a:ea typeface="Segoe UI" pitchFamily="34" charset="-122"/>
-                <a:cs typeface="Segoe UI" pitchFamily="34" charset="-120"/>
-              </a:rPr>
               <a:t>  docker compose up sobe API, Postgres e MailHog.</a:t>
             </a:r>
             <a:endParaRPr lang="en-US" sz="1300" dirty="0"/>
@@ -5880,6 +5911,13 @@
           </a:solidFill>
           <a:ln/>
         </p:spPr>
+        <p:txBody>
+          <a:bodyPr/>
+          <a:lstStyle/>
+          <a:p>
+            <a:endParaRPr lang="pt-BR"/>
+          </a:p>
+        </p:txBody>
       </p:sp>
       <p:sp>
         <p:nvSpPr>
@@ -5902,7 +5940,7 @@
           <a:bodyPr wrap="square" rtlCol="0" anchor="ctr"/>
           <a:lstStyle/>
           <a:p>
-            <a:pPr algn="r" indent="0" marL="0">
+            <a:pPr marL="0" indent="0" algn="r">
               <a:buNone/>
             </a:pPr>
             <a:r>
@@ -5936,6 +5974,7 @@
         <a:solidFill>
           <a:srgbClr val="F5F2ED"/>
         </a:solidFill>
+        <a:effectLst/>
       </p:bgPr>
     </p:bg>
     <p:spTree>
@@ -5973,7 +6012,7 @@
           <a:bodyPr wrap="square" rtlCol="0" anchor="b"/>
           <a:lstStyle/>
           <a:p>
-            <a:pPr indent="0" marL="0">
+            <a:pPr marL="0" indent="0">
               <a:buNone/>
             </a:pPr>
             <a:r>
@@ -6010,6 +6049,13 @@
           </a:solidFill>
           <a:ln/>
         </p:spPr>
+        <p:txBody>
+          <a:bodyPr/>
+          <a:lstStyle/>
+          <a:p>
+            <a:endParaRPr lang="pt-BR"/>
+          </a:p>
+        </p:txBody>
       </p:sp>
       <p:sp>
         <p:nvSpPr>
@@ -6032,7 +6078,7 @@
           <a:bodyPr wrap="square" rtlCol="0" anchor="t"/>
           <a:lstStyle/>
           <a:p>
-            <a:pPr indent="0" marL="0">
+            <a:pPr marL="0" indent="0">
               <a:lnSpc>
                 <a:spcPts val="2400"/>
               </a:lnSpc>
@@ -6072,6 +6118,13 @@
           </a:solidFill>
           <a:ln/>
         </p:spPr>
+        <p:txBody>
+          <a:bodyPr/>
+          <a:lstStyle/>
+          <a:p>
+            <a:endParaRPr lang="pt-BR"/>
+          </a:p>
+        </p:txBody>
       </p:sp>
       <p:sp>
         <p:nvSpPr>
@@ -6094,11 +6147,11 @@
           <a:bodyPr wrap="square" rtlCol="0" anchor="ctr"/>
           <a:lstStyle/>
           <a:p>
-            <a:pPr indent="0" marL="0">
-              <a:buNone/>
-            </a:pPr>
-            <a:r>
-              <a:rPr lang="en-US" sz="950" b="1" spc="140" kern="0" dirty="0">
+            <a:pPr marL="0" indent="0">
+              <a:buNone/>
+            </a:pPr>
+            <a:r>
+              <a:rPr lang="en-US" sz="950" b="1" kern="0" spc="140" dirty="0">
                 <a:solidFill>
                   <a:srgbClr val="767E86"/>
                 </a:solidFill>
@@ -6133,7 +6186,7 @@
           <a:bodyPr wrap="square" rtlCol="0" anchor="t"/>
           <a:lstStyle/>
           <a:p>
-            <a:pPr indent="0" marL="0">
+            <a:pPr marL="0" indent="0">
               <a:lnSpc>
                 <a:spcPts val="2200"/>
               </a:lnSpc>
@@ -6175,7 +6228,7 @@
           <a:bodyPr wrap="square" rtlCol="0" anchor="t"/>
           <a:lstStyle/>
           <a:p>
-            <a:pPr indent="0" marL="0">
+            <a:pPr marL="0" indent="0">
               <a:lnSpc>
                 <a:spcPts val="1900"/>
               </a:lnSpc>
@@ -6215,6 +6268,13 @@
           </a:solidFill>
           <a:ln/>
         </p:spPr>
+        <p:txBody>
+          <a:bodyPr/>
+          <a:lstStyle/>
+          <a:p>
+            <a:endParaRPr lang="pt-BR"/>
+          </a:p>
+        </p:txBody>
       </p:sp>
       <p:sp>
         <p:nvSpPr>
@@ -6237,11 +6297,11 @@
           <a:bodyPr wrap="square" rtlCol="0" anchor="ctr"/>
           <a:lstStyle/>
           <a:p>
-            <a:pPr indent="0" marL="0">
-              <a:buNone/>
-            </a:pPr>
-            <a:r>
-              <a:rPr lang="en-US" sz="950" b="1" spc="140" kern="0" dirty="0">
+            <a:pPr marL="0" indent="0">
+              <a:buNone/>
+            </a:pPr>
+            <a:r>
+              <a:rPr lang="en-US" sz="950" b="1" kern="0" spc="140" dirty="0">
                 <a:solidFill>
                   <a:srgbClr val="767E86"/>
                 </a:solidFill>
@@ -6276,7 +6336,7 @@
           <a:bodyPr wrap="square" rtlCol="0" anchor="t"/>
           <a:lstStyle/>
           <a:p>
-            <a:pPr indent="0" marL="0">
+            <a:pPr marL="0" indent="0">
               <a:lnSpc>
                 <a:spcPts val="2200"/>
               </a:lnSpc>
@@ -6318,7 +6378,7 @@
           <a:bodyPr wrap="square" rtlCol="0" anchor="t"/>
           <a:lstStyle/>
           <a:p>
-            <a:pPr indent="0" marL="0">
+            <a:pPr marL="0" indent="0">
               <a:lnSpc>
                 <a:spcPts val="1900"/>
               </a:lnSpc>
@@ -6358,6 +6418,13 @@
           </a:solidFill>
           <a:ln/>
         </p:spPr>
+        <p:txBody>
+          <a:bodyPr/>
+          <a:lstStyle/>
+          <a:p>
+            <a:endParaRPr lang="pt-BR"/>
+          </a:p>
+        </p:txBody>
       </p:sp>
       <p:sp>
         <p:nvSpPr>
@@ -6380,11 +6447,11 @@
           <a:bodyPr wrap="square" rtlCol="0" anchor="ctr"/>
           <a:lstStyle/>
           <a:p>
-            <a:pPr indent="0" marL="0">
-              <a:buNone/>
-            </a:pPr>
-            <a:r>
-              <a:rPr lang="en-US" sz="950" b="1" spc="140" kern="0" dirty="0">
+            <a:pPr marL="0" indent="0">
+              <a:buNone/>
+            </a:pPr>
+            <a:r>
+              <a:rPr lang="en-US" sz="950" b="1" kern="0" spc="140" dirty="0">
                 <a:solidFill>
                   <a:srgbClr val="767E86"/>
                 </a:solidFill>
@@ -6419,7 +6486,7 @@
           <a:bodyPr wrap="square" rtlCol="0" anchor="t"/>
           <a:lstStyle/>
           <a:p>
-            <a:pPr indent="0" marL="0">
+            <a:pPr marL="0" indent="0">
               <a:lnSpc>
                 <a:spcPts val="2200"/>
               </a:lnSpc>
@@ -6461,7 +6528,7 @@
           <a:bodyPr wrap="square" rtlCol="0" anchor="t"/>
           <a:lstStyle/>
           <a:p>
-            <a:pPr indent="0" marL="0">
+            <a:pPr marL="0" indent="0">
               <a:lnSpc>
                 <a:spcPts val="1900"/>
               </a:lnSpc>
@@ -6501,6 +6568,13 @@
           </a:solidFill>
           <a:ln/>
         </p:spPr>
+        <p:txBody>
+          <a:bodyPr/>
+          <a:lstStyle/>
+          <a:p>
+            <a:endParaRPr lang="pt-BR"/>
+          </a:p>
+        </p:txBody>
       </p:sp>
       <p:sp>
         <p:nvSpPr>
@@ -6523,7 +6597,7 @@
           <a:bodyPr wrap="square" rtlCol="0" anchor="t"/>
           <a:lstStyle/>
           <a:p>
-            <a:pPr indent="0" marL="0">
+            <a:pPr marL="0" indent="0">
               <a:lnSpc>
                 <a:spcPts val="2200"/>
               </a:lnSpc>
@@ -6540,100 +6614,95 @@
               </a:rPr>
               <a:t>Sem startupProbe, a liveness mata o app durante o boot.</a:t>
             </a:r>
-            <a:pPr indent="0" marL="0">
+            <a:r>
+              <a:rPr lang="en-US" sz="1400" dirty="0">
+                <a:solidFill>
+                  <a:srgbClr val="767E86"/>
+                </a:solidFill>
+                <a:latin typeface="Segoe UI" pitchFamily="34" charset="0"/>
+                <a:ea typeface="Segoe UI" pitchFamily="34" charset="-122"/>
+                <a:cs typeface="Segoe UI" pitchFamily="34" charset="-120"/>
+              </a:rPr>
+              <a:t>  Ela conta desde o início e derruba um pod saudável que só estava demorando a subir. O sintoma é CrashLoopBackOff — e parece bug da aplicação.</a:t>
+            </a:r>
+            <a:endParaRPr lang="en-US" sz="1400" dirty="0"/>
+          </a:p>
+        </p:txBody>
+      </p:sp>
+      <p:sp>
+        <p:nvSpPr>
+          <p:cNvPr id="20" name="Shape 17"/>
+          <p:cNvSpPr/>
+          <p:nvPr/>
+        </p:nvSpPr>
+        <p:spPr>
+          <a:xfrm>
+            <a:off x="822960" y="5568696"/>
+            <a:ext cx="100584" cy="100584"/>
+          </a:xfrm>
+          <a:prstGeom prst="rect">
+            <a:avLst/>
+          </a:prstGeom>
+          <a:solidFill>
+            <a:srgbClr val="1E6E63"/>
+          </a:solidFill>
+          <a:ln/>
+        </p:spPr>
+        <p:txBody>
+          <a:bodyPr/>
+          <a:lstStyle/>
+          <a:p>
+            <a:endParaRPr lang="pt-BR"/>
+          </a:p>
+        </p:txBody>
+      </p:sp>
+      <p:sp>
+        <p:nvSpPr>
+          <p:cNvPr id="21" name="Text 18"/>
+          <p:cNvSpPr/>
+          <p:nvPr/>
+        </p:nvSpPr>
+        <p:spPr>
+          <a:xfrm>
+            <a:off x="1097280" y="5422392"/>
+            <a:ext cx="10225735" cy="566928"/>
+          </a:xfrm>
+          <a:prstGeom prst="rect">
+            <a:avLst/>
+          </a:prstGeom>
+          <a:noFill/>
+          <a:ln/>
+        </p:spPr>
+        <p:txBody>
+          <a:bodyPr wrap="square" rtlCol="0" anchor="t"/>
+          <a:lstStyle/>
+          <a:p>
+            <a:pPr marL="0" indent="0">
               <a:lnSpc>
                 <a:spcPts val="2200"/>
               </a:lnSpc>
               <a:buNone/>
             </a:pPr>
             <a:r>
-              <a:rPr lang="en-US" sz="1400" dirty="0">
-                <a:solidFill>
-                  <a:srgbClr val="767E86"/>
+              <a:rPr lang="en-US" sz="1400" b="1" dirty="0">
+                <a:solidFill>
+                  <a:srgbClr val="2A2E33"/>
                 </a:solidFill>
                 <a:latin typeface="Segoe UI" pitchFamily="34" charset="0"/>
                 <a:ea typeface="Segoe UI" pitchFamily="34" charset="-122"/>
                 <a:cs typeface="Segoe UI" pitchFamily="34" charset="-120"/>
               </a:rPr>
-              <a:t>  Ela conta desde o início e derruba um pod saudável que só estava demorando a subir. O sintoma é CrashLoopBackOff — e parece bug da aplicação.</a:t>
-            </a:r>
-            <a:endParaRPr lang="en-US" sz="1400" dirty="0"/>
-          </a:p>
-        </p:txBody>
-      </p:sp>
-      <p:sp>
-        <p:nvSpPr>
-          <p:cNvPr id="20" name="Shape 17"/>
-          <p:cNvSpPr/>
-          <p:nvPr/>
-        </p:nvSpPr>
-        <p:spPr>
-          <a:xfrm>
-            <a:off x="822960" y="5568696"/>
-            <a:ext cx="100584" cy="100584"/>
-          </a:xfrm>
-          <a:prstGeom prst="rect">
-            <a:avLst/>
-          </a:prstGeom>
-          <a:solidFill>
-            <a:srgbClr val="1E6E63"/>
-          </a:solidFill>
-          <a:ln/>
-        </p:spPr>
-      </p:sp>
-      <p:sp>
-        <p:nvSpPr>
-          <p:cNvPr id="21" name="Text 18"/>
-          <p:cNvSpPr/>
-          <p:nvPr/>
-        </p:nvSpPr>
-        <p:spPr>
-          <a:xfrm>
-            <a:off x="1097280" y="5422392"/>
-            <a:ext cx="10225735" cy="566928"/>
-          </a:xfrm>
-          <a:prstGeom prst="rect">
-            <a:avLst/>
-          </a:prstGeom>
-          <a:noFill/>
-          <a:ln/>
-        </p:spPr>
-        <p:txBody>
-          <a:bodyPr wrap="square" rtlCol="0" anchor="t"/>
-          <a:lstStyle/>
-          <a:p>
-            <a:pPr indent="0" marL="0">
-              <a:lnSpc>
-                <a:spcPts val="2200"/>
-              </a:lnSpc>
-              <a:buNone/>
-            </a:pPr>
-            <a:r>
-              <a:rPr lang="en-US" sz="1400" b="1" dirty="0">
-                <a:solidFill>
-                  <a:srgbClr val="2A2E33"/>
+              <a:t>O metrics-server é responsabilidade nossa.</a:t>
+            </a:r>
+            <a:r>
+              <a:rPr lang="en-US" sz="1400" dirty="0">
+                <a:solidFill>
+                  <a:srgbClr val="767E86"/>
                 </a:solidFill>
                 <a:latin typeface="Segoe UI" pitchFamily="34" charset="0"/>
                 <a:ea typeface="Segoe UI" pitchFamily="34" charset="-122"/>
                 <a:cs typeface="Segoe UI" pitchFamily="34" charset="-120"/>
               </a:rPr>
-              <a:t>O metrics-server é responsabilidade nossa.</a:t>
-            </a:r>
-            <a:pPr indent="0" marL="0">
-              <a:lnSpc>
-                <a:spcPts val="2200"/>
-              </a:lnSpc>
-              <a:buNone/>
-            </a:pPr>
-            <a:r>
-              <a:rPr lang="en-US" sz="1400" dirty="0">
-                <a:solidFill>
-                  <a:srgbClr val="767E86"/>
-                </a:solidFill>
-                <a:latin typeface="Segoe UI" pitchFamily="34" charset="0"/>
-                <a:ea typeface="Segoe UI" pitchFamily="34" charset="-122"/>
-                <a:cs typeface="Segoe UI" pitchFamily="34" charset="-120"/>
-              </a:rPr>
               <a:t>  Nem o kind nem o EKS o trazem de fábrica. Sem ele, o HPA lê &lt;unknown&gt; para sempre e nunca escala.</a:t>
             </a:r>
             <a:endParaRPr lang="en-US" sz="1400" dirty="0"/>
@@ -6659,6 +6728,13 @@
           </a:solidFill>
           <a:ln/>
         </p:spPr>
+        <p:txBody>
+          <a:bodyPr/>
+          <a:lstStyle/>
+          <a:p>
+            <a:endParaRPr lang="pt-BR"/>
+          </a:p>
+        </p:txBody>
       </p:sp>
       <p:sp>
         <p:nvSpPr>
@@ -6681,7 +6757,7 @@
           <a:bodyPr wrap="square" rtlCol="0" anchor="ctr"/>
           <a:lstStyle/>
           <a:p>
-            <a:pPr algn="r" indent="0" marL="0">
+            <a:pPr marL="0" indent="0" algn="r">
               <a:buNone/>
             </a:pPr>
             <a:r>
@@ -6715,6 +6791,7 @@
         <a:solidFill>
           <a:srgbClr val="F5F2ED"/>
         </a:solidFill>
+        <a:effectLst/>
       </p:bgPr>
     </p:bg>
     <p:spTree>
@@ -6752,7 +6829,7 @@
           <a:bodyPr wrap="square" rtlCol="0" anchor="b"/>
           <a:lstStyle/>
           <a:p>
-            <a:pPr indent="0" marL="0">
+            <a:pPr marL="0" indent="0">
               <a:buNone/>
             </a:pPr>
             <a:r>
@@ -6789,6 +6866,13 @@
           </a:solidFill>
           <a:ln/>
         </p:spPr>
+        <p:txBody>
+          <a:bodyPr/>
+          <a:lstStyle/>
+          <a:p>
+            <a:endParaRPr lang="pt-BR"/>
+          </a:p>
+        </p:txBody>
       </p:sp>
       <p:sp>
         <p:nvSpPr>
@@ -6811,7 +6895,7 @@
           <a:bodyPr wrap="square" rtlCol="0" anchor="t"/>
           <a:lstStyle/>
           <a:p>
-            <a:pPr indent="0" marL="0">
+            <a:pPr marL="0" indent="0">
               <a:lnSpc>
                 <a:spcPts val="2400"/>
               </a:lnSpc>
@@ -6851,6 +6935,13 @@
           </a:solidFill>
           <a:ln/>
         </p:spPr>
+        <p:txBody>
+          <a:bodyPr/>
+          <a:lstStyle/>
+          <a:p>
+            <a:endParaRPr lang="pt-BR"/>
+          </a:p>
+        </p:txBody>
       </p:sp>
       <p:sp>
         <p:nvSpPr>
@@ -6871,6 +6962,13 @@
           </a:solidFill>
           <a:ln/>
         </p:spPr>
+        <p:txBody>
+          <a:bodyPr/>
+          <a:lstStyle/>
+          <a:p>
+            <a:endParaRPr lang="pt-BR"/>
+          </a:p>
+        </p:txBody>
       </p:sp>
       <p:sp>
         <p:nvSpPr>
@@ -6893,7 +6991,7 @@
           <a:bodyPr wrap="square" rtlCol="0" anchor="t"/>
           <a:lstStyle/>
           <a:p>
-            <a:pPr indent="0" marL="0">
+            <a:pPr marL="0" indent="0">
               <a:lnSpc>
                 <a:spcPts val="1400"/>
               </a:lnSpc>
@@ -6913,7 +7011,7 @@
             <a:endParaRPr lang="en-US" sz="950" dirty="0"/>
           </a:p>
           <a:p>
-            <a:pPr indent="0" marL="0">
+            <a:pPr marL="0" indent="0">
               <a:lnSpc>
                 <a:spcPts val="1400"/>
               </a:lnSpc>
@@ -6933,7 +7031,7 @@
             <a:endParaRPr lang="en-US" sz="950" dirty="0"/>
           </a:p>
           <a:p>
-            <a:pPr indent="0" marL="0">
+            <a:pPr marL="0" indent="0">
               <a:lnSpc>
                 <a:spcPts val="1400"/>
               </a:lnSpc>
@@ -6953,7 +7051,7 @@
             <a:endParaRPr lang="en-US" sz="950" dirty="0"/>
           </a:p>
           <a:p>
-            <a:pPr indent="0" marL="0">
+            <a:pPr marL="0" indent="0">
               <a:lnSpc>
                 <a:spcPts val="1400"/>
               </a:lnSpc>
@@ -6973,7 +7071,7 @@
             <a:endParaRPr lang="en-US" sz="950" dirty="0"/>
           </a:p>
           <a:p>
-            <a:pPr indent="0" marL="0">
+            <a:pPr marL="0" indent="0">
               <a:lnSpc>
                 <a:spcPts val="1400"/>
               </a:lnSpc>
@@ -6993,7 +7091,7 @@
             <a:endParaRPr lang="en-US" sz="950" dirty="0"/>
           </a:p>
           <a:p>
-            <a:pPr indent="0" marL="0">
+            <a:pPr marL="0" indent="0">
               <a:lnSpc>
                 <a:spcPts val="1400"/>
               </a:lnSpc>
@@ -7013,7 +7111,7 @@
             <a:endParaRPr lang="en-US" sz="950" dirty="0"/>
           </a:p>
           <a:p>
-            <a:pPr indent="0" marL="0">
+            <a:pPr marL="0" indent="0">
               <a:lnSpc>
                 <a:spcPts val="1400"/>
               </a:lnSpc>
@@ -7033,7 +7131,7 @@
             <a:endParaRPr lang="en-US" sz="950" dirty="0"/>
           </a:p>
           <a:p>
-            <a:pPr indent="0" marL="0">
+            <a:pPr marL="0" indent="0">
               <a:lnSpc>
                 <a:spcPts val="1400"/>
               </a:lnSpc>
@@ -7053,7 +7151,7 @@
             <a:endParaRPr lang="en-US" sz="950" dirty="0"/>
           </a:p>
           <a:p>
-            <a:pPr indent="0" marL="0">
+            <a:pPr marL="0" indent="0">
               <a:lnSpc>
                 <a:spcPts val="1400"/>
               </a:lnSpc>
@@ -7073,7 +7171,7 @@
             <a:endParaRPr lang="en-US" sz="950" dirty="0"/>
           </a:p>
           <a:p>
-            <a:pPr indent="0" marL="0">
+            <a:pPr marL="0" indent="0">
               <a:lnSpc>
                 <a:spcPts val="1400"/>
               </a:lnSpc>
@@ -7093,7 +7191,7 @@
             <a:endParaRPr lang="en-US" sz="950" dirty="0"/>
           </a:p>
           <a:p>
-            <a:pPr indent="0" marL="0">
+            <a:pPr marL="0" indent="0">
               <a:lnSpc>
                 <a:spcPts val="1400"/>
               </a:lnSpc>
@@ -7113,7 +7211,7 @@
             <a:endParaRPr lang="en-US" sz="950" dirty="0"/>
           </a:p>
           <a:p>
-            <a:pPr indent="0" marL="0">
+            <a:pPr marL="0" indent="0">
               <a:lnSpc>
                 <a:spcPts val="1400"/>
               </a:lnSpc>
@@ -7133,7 +7231,7 @@
             <a:endParaRPr lang="en-US" sz="950" dirty="0"/>
           </a:p>
           <a:p>
-            <a:pPr indent="0" marL="0">
+            <a:pPr marL="0" indent="0">
               <a:lnSpc>
                 <a:spcPts val="1400"/>
               </a:lnSpc>
@@ -7153,7 +7251,7 @@
             <a:endParaRPr lang="en-US" sz="950" dirty="0"/>
           </a:p>
           <a:p>
-            <a:pPr indent="0" marL="0">
+            <a:pPr marL="0" indent="0">
               <a:lnSpc>
                 <a:spcPts val="1400"/>
               </a:lnSpc>
@@ -7173,7 +7271,7 @@
             <a:endParaRPr lang="en-US" sz="950" dirty="0"/>
           </a:p>
           <a:p>
-            <a:pPr indent="0" marL="0">
+            <a:pPr marL="0" indent="0">
               <a:lnSpc>
                 <a:spcPts val="1400"/>
               </a:lnSpc>
@@ -7193,7 +7291,7 @@
             <a:endParaRPr lang="en-US" sz="950" dirty="0"/>
           </a:p>
           <a:p>
-            <a:pPr indent="0" marL="0">
+            <a:pPr marL="0" indent="0">
               <a:lnSpc>
                 <a:spcPts val="1400"/>
               </a:lnSpc>
@@ -7233,6 +7331,13 @@
           </a:solidFill>
           <a:ln/>
         </p:spPr>
+        <p:txBody>
+          <a:bodyPr/>
+          <a:lstStyle/>
+          <a:p>
+            <a:endParaRPr lang="pt-BR"/>
+          </a:p>
+        </p:txBody>
       </p:sp>
       <p:sp>
         <p:nvSpPr>
@@ -7255,7 +7360,7 @@
           <a:bodyPr wrap="square" rtlCol="0" anchor="t"/>
           <a:lstStyle/>
           <a:p>
-            <a:pPr indent="0" marL="0">
+            <a:pPr marL="0" indent="0">
               <a:lnSpc>
                 <a:spcPts val="1800"/>
               </a:lnSpc>
@@ -7272,22 +7377,96 @@
               </a:rPr>
               <a:t>Rede.</a:t>
             </a:r>
-            <a:pPr indent="0" marL="0">
+            <a:r>
+              <a:rPr lang="en-US" sz="1200" dirty="0">
+                <a:solidFill>
+                  <a:srgbClr val="767E86"/>
+                </a:solidFill>
+                <a:latin typeface="Segoe UI" pitchFamily="34" charset="0"/>
+                <a:ea typeface="Segoe UI" pitchFamily="34" charset="-122"/>
+                <a:cs typeface="Segoe UI" pitchFamily="34" charset="-120"/>
+              </a:rPr>
+              <a:t>  VPC 10.0.0.0/16, duas subnets públicas (us-east-1a e 1b), Internet Gateway e rota default. Sem NAT Gateway: os nós ficam em subnet pública, com Security Group restritivo — trade-off aceito porque o cluster é efêmero.</a:t>
+            </a:r>
+            <a:endParaRPr lang="en-US" sz="1200" dirty="0"/>
+          </a:p>
+        </p:txBody>
+      </p:sp>
+      <p:sp>
+        <p:nvSpPr>
+          <p:cNvPr id="11" name="Shape 8"/>
+          <p:cNvSpPr/>
+          <p:nvPr/>
+        </p:nvSpPr>
+        <p:spPr>
+          <a:xfrm>
+            <a:off x="6583680" y="4206240"/>
+            <a:ext cx="91440" cy="91440"/>
+          </a:xfrm>
+          <a:prstGeom prst="rect">
+            <a:avLst/>
+          </a:prstGeom>
+          <a:solidFill>
+            <a:srgbClr val="1E6E63"/>
+          </a:solidFill>
+          <a:ln/>
+        </p:spPr>
+        <p:txBody>
+          <a:bodyPr/>
+          <a:lstStyle/>
+          <a:p>
+            <a:endParaRPr lang="pt-BR"/>
+          </a:p>
+        </p:txBody>
+      </p:sp>
+      <p:sp>
+        <p:nvSpPr>
+          <p:cNvPr id="12" name="Text 9"/>
+          <p:cNvSpPr/>
+          <p:nvPr/>
+        </p:nvSpPr>
+        <p:spPr>
+          <a:xfrm>
+            <a:off x="6821424" y="4087368"/>
+            <a:ext cx="4529023" cy="777240"/>
+          </a:xfrm>
+          <a:prstGeom prst="rect">
+            <a:avLst/>
+          </a:prstGeom>
+          <a:noFill/>
+          <a:ln/>
+        </p:spPr>
+        <p:txBody>
+          <a:bodyPr wrap="square" rtlCol="0" anchor="t"/>
+          <a:lstStyle/>
+          <a:p>
+            <a:pPr marL="0" indent="0">
               <a:lnSpc>
                 <a:spcPts val="1800"/>
               </a:lnSpc>
               <a:buNone/>
             </a:pPr>
             <a:r>
-              <a:rPr lang="en-US" sz="1200" dirty="0">
-                <a:solidFill>
-                  <a:srgbClr val="767E86"/>
+              <a:rPr lang="en-US" sz="1200" b="1" dirty="0">
+                <a:solidFill>
+                  <a:srgbClr val="2A2E33"/>
                 </a:solidFill>
                 <a:latin typeface="Segoe UI" pitchFamily="34" charset="0"/>
                 <a:ea typeface="Segoe UI" pitchFamily="34" charset="-122"/>
                 <a:cs typeface="Segoe UI" pitchFamily="34" charset="-120"/>
               </a:rPr>
-              <a:t>  VPC 10.0.0.0/16, duas subnets públicas (us-east-1a e 1b), Internet Gateway e rota default. Sem NAT Gateway: os nós ficam em subnet pública, com Security Group restritivo — trade-off aceito porque o cluster é efêmero.</a:t>
+              <a:t>IAM.</a:t>
+            </a:r>
+            <a:r>
+              <a:rPr lang="en-US" sz="1200" dirty="0">
+                <a:solidFill>
+                  <a:srgbClr val="767E86"/>
+                </a:solidFill>
+                <a:latin typeface="Segoe UI" pitchFamily="34" charset="0"/>
+                <a:ea typeface="Segoe UI" pitchFamily="34" charset="-122"/>
+                <a:cs typeface="Segoe UI" pitchFamily="34" charset="-120"/>
+              </a:rPr>
+              <a:t>  Duas roles — cluster e nós — com as quatro managed policies que o EKS exige.</a:t>
             </a:r>
             <a:endParaRPr lang="en-US" sz="1200" dirty="0"/>
           </a:p>
@@ -7295,13 +7474,13 @@
       </p:sp>
       <p:sp>
         <p:nvSpPr>
-          <p:cNvPr id="11" name="Shape 8"/>
-          <p:cNvSpPr/>
-          <p:nvPr/>
-        </p:nvSpPr>
-        <p:spPr>
-          <a:xfrm>
-            <a:off x="6583680" y="4206240"/>
+          <p:cNvPr id="13" name="Shape 10"/>
+          <p:cNvSpPr/>
+          <p:nvPr/>
+        </p:nvSpPr>
+        <p:spPr>
+          <a:xfrm>
+            <a:off x="6583680" y="5093208"/>
             <a:ext cx="91440" cy="91440"/>
           </a:xfrm>
           <a:prstGeom prst="rect">
@@ -7312,17 +7491,24 @@
           </a:solidFill>
           <a:ln/>
         </p:spPr>
-      </p:sp>
-      <p:sp>
-        <p:nvSpPr>
-          <p:cNvPr id="12" name="Text 9"/>
-          <p:cNvSpPr/>
-          <p:nvPr/>
-        </p:nvSpPr>
-        <p:spPr>
-          <a:xfrm>
-            <a:off x="6821424" y="4087368"/>
-            <a:ext cx="4529023" cy="777240"/>
+        <p:txBody>
+          <a:bodyPr/>
+          <a:lstStyle/>
+          <a:p>
+            <a:endParaRPr lang="pt-BR"/>
+          </a:p>
+        </p:txBody>
+      </p:sp>
+      <p:sp>
+        <p:nvSpPr>
+          <p:cNvPr id="14" name="Text 11"/>
+          <p:cNvSpPr/>
+          <p:nvPr/>
+        </p:nvSpPr>
+        <p:spPr>
+          <a:xfrm>
+            <a:off x="6821424" y="4974336"/>
+            <a:ext cx="4529023" cy="566928"/>
           </a:xfrm>
           <a:prstGeom prst="rect">
             <a:avLst/>
@@ -7334,7 +7520,7 @@
           <a:bodyPr wrap="square" rtlCol="0" anchor="t"/>
           <a:lstStyle/>
           <a:p>
-            <a:pPr indent="0" marL="0">
+            <a:pPr marL="0" indent="0">
               <a:lnSpc>
                 <a:spcPts val="1800"/>
               </a:lnSpc>
@@ -7349,181 +7535,97 @@
                 <a:ea typeface="Segoe UI" pitchFamily="34" charset="-122"/>
                 <a:cs typeface="Segoe UI" pitchFamily="34" charset="-120"/>
               </a:rPr>
-              <a:t>IAM.</a:t>
-            </a:r>
-            <a:pPr indent="0" marL="0">
+              <a:t>Computação.</a:t>
+            </a:r>
+            <a:r>
+              <a:rPr lang="en-US" sz="1200" dirty="0">
+                <a:solidFill>
+                  <a:srgbClr val="767E86"/>
+                </a:solidFill>
+                <a:latin typeface="Segoe UI" pitchFamily="34" charset="0"/>
+                <a:ea typeface="Segoe UI" pitchFamily="34" charset="-122"/>
+                <a:cs typeface="Segoe UI" pitchFamily="34" charset="-120"/>
+              </a:rPr>
+              <a:t>  EKS 1.33, node group gerenciado de 2 a 3 nós t3.small.</a:t>
+            </a:r>
+            <a:endParaRPr lang="en-US" sz="1200" dirty="0"/>
+          </a:p>
+        </p:txBody>
+      </p:sp>
+      <p:sp>
+        <p:nvSpPr>
+          <p:cNvPr id="15" name="Shape 12"/>
+          <p:cNvSpPr/>
+          <p:nvPr/>
+        </p:nvSpPr>
+        <p:spPr>
+          <a:xfrm>
+            <a:off x="6583680" y="5769864"/>
+            <a:ext cx="91440" cy="91440"/>
+          </a:xfrm>
+          <a:prstGeom prst="rect">
+            <a:avLst/>
+          </a:prstGeom>
+          <a:solidFill>
+            <a:srgbClr val="C46B2E"/>
+          </a:solidFill>
+          <a:ln/>
+        </p:spPr>
+        <p:txBody>
+          <a:bodyPr/>
+          <a:lstStyle/>
+          <a:p>
+            <a:endParaRPr lang="pt-BR"/>
+          </a:p>
+        </p:txBody>
+      </p:sp>
+      <p:sp>
+        <p:nvSpPr>
+          <p:cNvPr id="16" name="Text 13"/>
+          <p:cNvSpPr/>
+          <p:nvPr/>
+        </p:nvSpPr>
+        <p:spPr>
+          <a:xfrm>
+            <a:off x="6821424" y="5650992"/>
+            <a:ext cx="4529023" cy="777240"/>
+          </a:xfrm>
+          <a:prstGeom prst="rect">
+            <a:avLst/>
+          </a:prstGeom>
+          <a:noFill/>
+          <a:ln/>
+        </p:spPr>
+        <p:txBody>
+          <a:bodyPr wrap="square" rtlCol="0" anchor="t"/>
+          <a:lstStyle/>
+          <a:p>
+            <a:pPr marL="0" indent="0">
               <a:lnSpc>
                 <a:spcPts val="1800"/>
               </a:lnSpc>
               <a:buNone/>
             </a:pPr>
             <a:r>
-              <a:rPr lang="en-US" sz="1200" dirty="0">
-                <a:solidFill>
-                  <a:srgbClr val="767E86"/>
+              <a:rPr lang="en-US" sz="1200" b="1" dirty="0">
+                <a:solidFill>
+                  <a:srgbClr val="2A2E33"/>
                 </a:solidFill>
                 <a:latin typeface="Segoe UI" pitchFamily="34" charset="0"/>
                 <a:ea typeface="Segoe UI" pitchFamily="34" charset="-122"/>
                 <a:cs typeface="Segoe UI" pitchFamily="34" charset="-120"/>
               </a:rPr>
-              <a:t>  Duas roles — cluster e nós — com as quatro managed policies que o EKS exige.</a:t>
-            </a:r>
-            <a:endParaRPr lang="en-US" sz="1200" dirty="0"/>
-          </a:p>
-        </p:txBody>
-      </p:sp>
-      <p:sp>
-        <p:nvSpPr>
-          <p:cNvPr id="13" name="Shape 10"/>
-          <p:cNvSpPr/>
-          <p:nvPr/>
-        </p:nvSpPr>
-        <p:spPr>
-          <a:xfrm>
-            <a:off x="6583680" y="5093208"/>
-            <a:ext cx="91440" cy="91440"/>
-          </a:xfrm>
-          <a:prstGeom prst="rect">
-            <a:avLst/>
-          </a:prstGeom>
-          <a:solidFill>
-            <a:srgbClr val="1E6E63"/>
-          </a:solidFill>
-          <a:ln/>
-        </p:spPr>
-      </p:sp>
-      <p:sp>
-        <p:nvSpPr>
-          <p:cNvPr id="14" name="Text 11"/>
-          <p:cNvSpPr/>
-          <p:nvPr/>
-        </p:nvSpPr>
-        <p:spPr>
-          <a:xfrm>
-            <a:off x="6821424" y="4974336"/>
-            <a:ext cx="4529023" cy="566928"/>
-          </a:xfrm>
-          <a:prstGeom prst="rect">
-            <a:avLst/>
-          </a:prstGeom>
-          <a:noFill/>
-          <a:ln/>
-        </p:spPr>
-        <p:txBody>
-          <a:bodyPr wrap="square" rtlCol="0" anchor="t"/>
-          <a:lstStyle/>
-          <a:p>
-            <a:pPr indent="0" marL="0">
-              <a:lnSpc>
-                <a:spcPts val="1800"/>
-              </a:lnSpc>
-              <a:buNone/>
-            </a:pPr>
-            <a:r>
-              <a:rPr lang="en-US" sz="1200" b="1" dirty="0">
-                <a:solidFill>
-                  <a:srgbClr val="2A2E33"/>
+              <a:t>Exposição.</a:t>
+            </a:r>
+            <a:r>
+              <a:rPr lang="en-US" sz="1200" dirty="0">
+                <a:solidFill>
+                  <a:srgbClr val="767E86"/>
                 </a:solidFill>
                 <a:latin typeface="Segoe UI" pitchFamily="34" charset="0"/>
                 <a:ea typeface="Segoe UI" pitchFamily="34" charset="-122"/>
                 <a:cs typeface="Segoe UI" pitchFamily="34" charset="-120"/>
               </a:rPr>
-              <a:t>Computação.</a:t>
-            </a:r>
-            <a:pPr indent="0" marL="0">
-              <a:lnSpc>
-                <a:spcPts val="1800"/>
-              </a:lnSpc>
-              <a:buNone/>
-            </a:pPr>
-            <a:r>
-              <a:rPr lang="en-US" sz="1200" dirty="0">
-                <a:solidFill>
-                  <a:srgbClr val="767E86"/>
-                </a:solidFill>
-                <a:latin typeface="Segoe UI" pitchFamily="34" charset="0"/>
-                <a:ea typeface="Segoe UI" pitchFamily="34" charset="-122"/>
-                <a:cs typeface="Segoe UI" pitchFamily="34" charset="-120"/>
-              </a:rPr>
-              <a:t>  EKS 1.33, node group gerenciado de 2 a 3 nós t3.small.</a:t>
-            </a:r>
-            <a:endParaRPr lang="en-US" sz="1200" dirty="0"/>
-          </a:p>
-        </p:txBody>
-      </p:sp>
-      <p:sp>
-        <p:nvSpPr>
-          <p:cNvPr id="15" name="Shape 12"/>
-          <p:cNvSpPr/>
-          <p:nvPr/>
-        </p:nvSpPr>
-        <p:spPr>
-          <a:xfrm>
-            <a:off x="6583680" y="5769864"/>
-            <a:ext cx="91440" cy="91440"/>
-          </a:xfrm>
-          <a:prstGeom prst="rect">
-            <a:avLst/>
-          </a:prstGeom>
-          <a:solidFill>
-            <a:srgbClr val="C46B2E"/>
-          </a:solidFill>
-          <a:ln/>
-        </p:spPr>
-      </p:sp>
-      <p:sp>
-        <p:nvSpPr>
-          <p:cNvPr id="16" name="Text 13"/>
-          <p:cNvSpPr/>
-          <p:nvPr/>
-        </p:nvSpPr>
-        <p:spPr>
-          <a:xfrm>
-            <a:off x="6821424" y="5650992"/>
-            <a:ext cx="4529023" cy="777240"/>
-          </a:xfrm>
-          <a:prstGeom prst="rect">
-            <a:avLst/>
-          </a:prstGeom>
-          <a:noFill/>
-          <a:ln/>
-        </p:spPr>
-        <p:txBody>
-          <a:bodyPr wrap="square" rtlCol="0" anchor="t"/>
-          <a:lstStyle/>
-          <a:p>
-            <a:pPr indent="0" marL="0">
-              <a:lnSpc>
-                <a:spcPts val="1800"/>
-              </a:lnSpc>
-              <a:buNone/>
-            </a:pPr>
-            <a:r>
-              <a:rPr lang="en-US" sz="1200" b="1" dirty="0">
-                <a:solidFill>
-                  <a:srgbClr val="2A2E33"/>
-                </a:solidFill>
-                <a:latin typeface="Segoe UI" pitchFamily="34" charset="0"/>
-                <a:ea typeface="Segoe UI" pitchFamily="34" charset="-122"/>
-                <a:cs typeface="Segoe UI" pitchFamily="34" charset="-120"/>
-              </a:rPr>
-              <a:t>Exposição.</a:t>
-            </a:r>
-            <a:pPr indent="0" marL="0">
-              <a:lnSpc>
-                <a:spcPts val="1800"/>
-              </a:lnSpc>
-              <a:buNone/>
-            </a:pPr>
-            <a:r>
-              <a:rPr lang="en-US" sz="1200" dirty="0">
-                <a:solidFill>
-                  <a:srgbClr val="767E86"/>
-                </a:solidFill>
-                <a:latin typeface="Segoe UI" pitchFamily="34" charset="0"/>
-                <a:ea typeface="Segoe UI" pitchFamily="34" charset="-122"/>
-                <a:cs typeface="Segoe UI" pitchFamily="34" charset="-120"/>
-              </a:rPr>
               <a:t>  Service type LoadBalancer: o cloud controller do EKS provisiona um ELB e devolve o hostname público.</a:t>
             </a:r>
             <a:endParaRPr lang="en-US" sz="1200" dirty="0"/>
@@ -7549,6 +7651,13 @@
           </a:solidFill>
           <a:ln/>
         </p:spPr>
+        <p:txBody>
+          <a:bodyPr/>
+          <a:lstStyle/>
+          <a:p>
+            <a:endParaRPr lang="pt-BR"/>
+          </a:p>
+        </p:txBody>
       </p:sp>
       <p:sp>
         <p:nvSpPr>
@@ -7571,7 +7680,7 @@
           <a:bodyPr wrap="square" rtlCol="0" anchor="ctr"/>
           <a:lstStyle/>
           <a:p>
-            <a:pPr algn="r" indent="0" marL="0">
+            <a:pPr marL="0" indent="0" algn="r">
               <a:buNone/>
             </a:pPr>
             <a:r>
@@ -7605,6 +7714,7 @@
         <a:solidFill>
           <a:srgbClr val="F5F2ED"/>
         </a:solidFill>
+        <a:effectLst/>
       </p:bgPr>
     </p:bg>
     <p:spTree>
@@ -7642,7 +7752,7 @@
           <a:bodyPr wrap="square" rtlCol="0" anchor="b"/>
           <a:lstStyle/>
           <a:p>
-            <a:pPr indent="0" marL="0">
+            <a:pPr marL="0" indent="0">
               <a:buNone/>
             </a:pPr>
             <a:r>
@@ -7679,6 +7789,13 @@
           </a:solidFill>
           <a:ln/>
         </p:spPr>
+        <p:txBody>
+          <a:bodyPr/>
+          <a:lstStyle/>
+          <a:p>
+            <a:endParaRPr lang="pt-BR"/>
+          </a:p>
+        </p:txBody>
       </p:sp>
       <p:sp>
         <p:nvSpPr>
@@ -7701,7 +7818,7 @@
           <a:bodyPr wrap="square" rtlCol="0" anchor="t"/>
           <a:lstStyle/>
           <a:p>
-            <a:pPr indent="0" marL="0">
+            <a:pPr marL="0" indent="0">
               <a:lnSpc>
                 <a:spcPts val="2400"/>
               </a:lnSpc>
@@ -7741,6 +7858,13 @@
           </a:solidFill>
           <a:ln/>
         </p:spPr>
+        <p:txBody>
+          <a:bodyPr/>
+          <a:lstStyle/>
+          <a:p>
+            <a:endParaRPr lang="pt-BR"/>
+          </a:p>
+        </p:txBody>
       </p:sp>
       <p:sp>
         <p:nvSpPr>
@@ -7763,11 +7887,11 @@
           <a:bodyPr wrap="square" rtlCol="0" anchor="ctr"/>
           <a:lstStyle/>
           <a:p>
-            <a:pPr indent="0" marL="0">
-              <a:buNone/>
-            </a:pPr>
-            <a:r>
-              <a:rPr lang="en-US" sz="950" b="1" spc="140" kern="0" dirty="0">
+            <a:pPr marL="0" indent="0">
+              <a:buNone/>
+            </a:pPr>
+            <a:r>
+              <a:rPr lang="en-US" sz="950" b="1" kern="0" spc="140" dirty="0">
                 <a:solidFill>
                   <a:srgbClr val="767E86"/>
                 </a:solidFill>
@@ -7802,7 +7926,7 @@
           <a:bodyPr wrap="square" rtlCol="0" anchor="t"/>
           <a:lstStyle/>
           <a:p>
-            <a:pPr indent="0" marL="0">
+            <a:pPr marL="0" indent="0">
               <a:lnSpc>
                 <a:spcPts val="2200"/>
               </a:lnSpc>
@@ -7844,7 +7968,7 @@
           <a:bodyPr wrap="square" rtlCol="0" anchor="t"/>
           <a:lstStyle/>
           <a:p>
-            <a:pPr indent="0" marL="0">
+            <a:pPr marL="0" indent="0">
               <a:lnSpc>
                 <a:spcPts val="1900"/>
               </a:lnSpc>
@@ -7884,6 +8008,13 @@
           </a:solidFill>
           <a:ln/>
         </p:spPr>
+        <p:txBody>
+          <a:bodyPr/>
+          <a:lstStyle/>
+          <a:p>
+            <a:endParaRPr lang="pt-BR"/>
+          </a:p>
+        </p:txBody>
       </p:sp>
       <p:sp>
         <p:nvSpPr>
@@ -7906,11 +8037,11 @@
           <a:bodyPr wrap="square" rtlCol="0" anchor="ctr"/>
           <a:lstStyle/>
           <a:p>
-            <a:pPr indent="0" marL="0">
-              <a:buNone/>
-            </a:pPr>
-            <a:r>
-              <a:rPr lang="en-US" sz="950" b="1" spc="140" kern="0" dirty="0">
+            <a:pPr marL="0" indent="0">
+              <a:buNone/>
+            </a:pPr>
+            <a:r>
+              <a:rPr lang="en-US" sz="950" b="1" kern="0" spc="140" dirty="0">
                 <a:solidFill>
                   <a:srgbClr val="767E86"/>
                 </a:solidFill>
@@ -7945,7 +8076,7 @@
           <a:bodyPr wrap="square" rtlCol="0" anchor="t"/>
           <a:lstStyle/>
           <a:p>
-            <a:pPr indent="0" marL="0">
+            <a:pPr marL="0" indent="0">
               <a:lnSpc>
                 <a:spcPts val="2200"/>
               </a:lnSpc>
@@ -7987,7 +8118,7 @@
           <a:bodyPr wrap="square" rtlCol="0" anchor="t"/>
           <a:lstStyle/>
           <a:p>
-            <a:pPr indent="0" marL="0">
+            <a:pPr marL="0" indent="0">
               <a:lnSpc>
                 <a:spcPts val="1900"/>
               </a:lnSpc>
@@ -8027,6 +8158,13 @@
           </a:solidFill>
           <a:ln/>
         </p:spPr>
+        <p:txBody>
+          <a:bodyPr/>
+          <a:lstStyle/>
+          <a:p>
+            <a:endParaRPr lang="pt-BR"/>
+          </a:p>
+        </p:txBody>
       </p:sp>
       <p:sp>
         <p:nvSpPr>
@@ -8049,11 +8187,11 @@
           <a:bodyPr wrap="square" rtlCol="0" anchor="ctr"/>
           <a:lstStyle/>
           <a:p>
-            <a:pPr indent="0" marL="0">
-              <a:buNone/>
-            </a:pPr>
-            <a:r>
-              <a:rPr lang="en-US" sz="950" b="1" spc="140" kern="0" dirty="0">
+            <a:pPr marL="0" indent="0">
+              <a:buNone/>
+            </a:pPr>
+            <a:r>
+              <a:rPr lang="en-US" sz="950" b="1" kern="0" spc="140" dirty="0">
                 <a:solidFill>
                   <a:srgbClr val="767E86"/>
                 </a:solidFill>
@@ -8088,7 +8226,7 @@
           <a:bodyPr wrap="square" rtlCol="0" anchor="t"/>
           <a:lstStyle/>
           <a:p>
-            <a:pPr indent="0" marL="0">
+            <a:pPr marL="0" indent="0">
               <a:lnSpc>
                 <a:spcPts val="2200"/>
               </a:lnSpc>
@@ -8130,7 +8268,7 @@
           <a:bodyPr wrap="square" rtlCol="0" anchor="t"/>
           <a:lstStyle/>
           <a:p>
-            <a:pPr indent="0" marL="0">
+            <a:pPr marL="0" indent="0">
               <a:lnSpc>
                 <a:spcPts val="1900"/>
               </a:lnSpc>
@@ -8175,6 +8313,13 @@
             <a:prstDash val="solid"/>
           </a:ln>
         </p:spPr>
+        <p:txBody>
+          <a:bodyPr/>
+          <a:lstStyle/>
+          <a:p>
+            <a:endParaRPr lang="pt-BR"/>
+          </a:p>
+        </p:txBody>
       </p:sp>
       <p:sp>
         <p:nvSpPr>
@@ -8197,7 +8342,7 @@
           <a:bodyPr wrap="square" rtlCol="0" anchor="ctr"/>
           <a:lstStyle/>
           <a:p>
-            <a:pPr algn="ctr" indent="0" marL="0">
+            <a:pPr marL="0" indent="0" algn="ctr">
               <a:buNone/>
             </a:pPr>
             <a:r>
@@ -8236,7 +8381,7 @@
           <a:bodyPr wrap="square" rtlCol="0" anchor="ctr"/>
           <a:lstStyle/>
           <a:p>
-            <a:pPr algn="ctr" indent="0" marL="0">
+            <a:pPr marL="0" indent="0" algn="ctr">
               <a:buNone/>
             </a:pPr>
             <a:r>
@@ -8278,6 +8423,13 @@
             <a:prstDash val="solid"/>
           </a:ln>
         </p:spPr>
+        <p:txBody>
+          <a:bodyPr/>
+          <a:lstStyle/>
+          <a:p>
+            <a:endParaRPr lang="pt-BR"/>
+          </a:p>
+        </p:txBody>
       </p:sp>
       <p:sp>
         <p:nvSpPr>
@@ -8300,7 +8452,7 @@
           <a:bodyPr wrap="square" rtlCol="0" anchor="ctr"/>
           <a:lstStyle/>
           <a:p>
-            <a:pPr algn="ctr" indent="0" marL="0">
+            <a:pPr marL="0" indent="0" algn="ctr">
               <a:buNone/>
             </a:pPr>
             <a:r>
@@ -8339,7 +8491,7 @@
           <a:bodyPr wrap="square" rtlCol="0" anchor="ctr"/>
           <a:lstStyle/>
           <a:p>
-            <a:pPr algn="ctr" indent="0" marL="0">
+            <a:pPr marL="0" indent="0" algn="ctr">
               <a:buNone/>
             </a:pPr>
             <a:r>
@@ -8381,6 +8533,13 @@
             <a:prstDash val="solid"/>
           </a:ln>
         </p:spPr>
+        <p:txBody>
+          <a:bodyPr/>
+          <a:lstStyle/>
+          <a:p>
+            <a:endParaRPr lang="pt-BR"/>
+          </a:p>
+        </p:txBody>
       </p:sp>
       <p:sp>
         <p:nvSpPr>
@@ -8403,7 +8562,7 @@
           <a:bodyPr wrap="square" rtlCol="0" anchor="ctr"/>
           <a:lstStyle/>
           <a:p>
-            <a:pPr algn="ctr" indent="0" marL="0">
+            <a:pPr marL="0" indent="0" algn="ctr">
               <a:buNone/>
             </a:pPr>
             <a:r>
@@ -8442,7 +8601,7 @@
           <a:bodyPr wrap="square" rtlCol="0" anchor="ctr"/>
           <a:lstStyle/>
           <a:p>
-            <a:pPr algn="ctr" indent="0" marL="0">
+            <a:pPr marL="0" indent="0" algn="ctr">
               <a:buNone/>
             </a:pPr>
             <a:r>
@@ -8484,6 +8643,13 @@
             <a:prstDash val="solid"/>
           </a:ln>
         </p:spPr>
+        <p:txBody>
+          <a:bodyPr/>
+          <a:lstStyle/>
+          <a:p>
+            <a:endParaRPr lang="pt-BR"/>
+          </a:p>
+        </p:txBody>
       </p:sp>
       <p:sp>
         <p:nvSpPr>
@@ -8506,7 +8672,7 @@
           <a:bodyPr wrap="square" rtlCol="0" anchor="ctr"/>
           <a:lstStyle/>
           <a:p>
-            <a:pPr algn="ctr" indent="0" marL="0">
+            <a:pPr marL="0" indent="0" algn="ctr">
               <a:buNone/>
             </a:pPr>
             <a:r>
@@ -8545,7 +8711,7 @@
           <a:bodyPr wrap="square" rtlCol="0" anchor="ctr"/>
           <a:lstStyle/>
           <a:p>
-            <a:pPr algn="ctr" indent="0" marL="0">
+            <a:pPr marL="0" indent="0" algn="ctr">
               <a:buNone/>
             </a:pPr>
             <a:r>
@@ -8587,6 +8753,13 @@
             <a:prstDash val="solid"/>
           </a:ln>
         </p:spPr>
+        <p:txBody>
+          <a:bodyPr/>
+          <a:lstStyle/>
+          <a:p>
+            <a:endParaRPr lang="pt-BR"/>
+          </a:p>
+        </p:txBody>
       </p:sp>
       <p:sp>
         <p:nvSpPr>
@@ -8609,7 +8782,7 @@
           <a:bodyPr wrap="square" rtlCol="0" anchor="ctr"/>
           <a:lstStyle/>
           <a:p>
-            <a:pPr algn="ctr" indent="0" marL="0">
+            <a:pPr marL="0" indent="0" algn="ctr">
               <a:buNone/>
             </a:pPr>
             <a:r>
@@ -8648,7 +8821,7 @@
           <a:bodyPr wrap="square" rtlCol="0" anchor="ctr"/>
           <a:lstStyle/>
           <a:p>
-            <a:pPr algn="ctr" indent="0" marL="0">
+            <a:pPr marL="0" indent="0" algn="ctr">
               <a:buNone/>
             </a:pPr>
             <a:r>
@@ -8685,6 +8858,13 @@
           </a:solidFill>
           <a:ln/>
         </p:spPr>
+        <p:txBody>
+          <a:bodyPr/>
+          <a:lstStyle/>
+          <a:p>
+            <a:endParaRPr lang="pt-BR"/>
+          </a:p>
+        </p:txBody>
       </p:sp>
       <p:sp>
         <p:nvSpPr>
@@ -8707,7 +8887,7 @@
           <a:bodyPr wrap="square" rtlCol="0" anchor="ctr"/>
           <a:lstStyle/>
           <a:p>
-            <a:pPr algn="r" indent="0" marL="0">
+            <a:pPr marL="0" indent="0" algn="r">
               <a:buNone/>
             </a:pPr>
             <a:r>
@@ -8741,6 +8921,7 @@
         <a:solidFill>
           <a:srgbClr val="F5F2ED"/>
         </a:solidFill>
+        <a:effectLst/>
       </p:bgPr>
     </p:bg>
     <p:spTree>
@@ -8778,7 +8959,7 @@
           <a:bodyPr wrap="square" rtlCol="0" anchor="b"/>
           <a:lstStyle/>
           <a:p>
-            <a:pPr indent="0" marL="0">
+            <a:pPr marL="0" indent="0">
               <a:buNone/>
             </a:pPr>
             <a:r>
@@ -8815,6 +8996,13 @@
           </a:solidFill>
           <a:ln/>
         </p:spPr>
+        <p:txBody>
+          <a:bodyPr/>
+          <a:lstStyle/>
+          <a:p>
+            <a:endParaRPr lang="pt-BR"/>
+          </a:p>
+        </p:txBody>
       </p:sp>
       <p:sp>
         <p:nvSpPr>
@@ -8837,7 +9025,7 @@
           <a:bodyPr wrap="square" rtlCol="0" anchor="t"/>
           <a:lstStyle/>
           <a:p>
-            <a:pPr indent="0" marL="0">
+            <a:pPr marL="0" indent="0">
               <a:lnSpc>
                 <a:spcPts val="2400"/>
               </a:lnSpc>
@@ -8879,11 +9067,11 @@
           <a:bodyPr wrap="square" rtlCol="0" anchor="ctr"/>
           <a:lstStyle/>
           <a:p>
-            <a:pPr indent="0" marL="0">
-              <a:buNone/>
-            </a:pPr>
-            <a:r>
-              <a:rPr lang="en-US" sz="950" b="1" spc="140" kern="0" dirty="0">
+            <a:pPr marL="0" indent="0">
+              <a:buNone/>
+            </a:pPr>
+            <a:r>
+              <a:rPr lang="en-US" sz="950" b="1" kern="0" spc="140" dirty="0">
                 <a:solidFill>
                   <a:srgbClr val="767E86"/>
                 </a:solidFill>
@@ -8921,6 +9109,13 @@
             <a:prstDash val="solid"/>
           </a:ln>
         </p:spPr>
+        <p:txBody>
+          <a:bodyPr/>
+          <a:lstStyle/>
+          <a:p>
+            <a:endParaRPr lang="pt-BR"/>
+          </a:p>
+        </p:txBody>
       </p:sp>
       <p:sp>
         <p:nvSpPr>
@@ -8943,7 +9138,7 @@
           <a:bodyPr wrap="square" rtlCol="0" anchor="ctr"/>
           <a:lstStyle/>
           <a:p>
-            <a:pPr algn="ctr" indent="0" marL="0">
+            <a:pPr marL="0" indent="0" algn="ctr">
               <a:buNone/>
             </a:pPr>
             <a:r>
@@ -8982,7 +9177,7 @@
           <a:bodyPr wrap="square" rtlCol="0" anchor="ctr"/>
           <a:lstStyle/>
           <a:p>
-            <a:pPr algn="ctr" indent="0" marL="0">
+            <a:pPr marL="0" indent="0" algn="ctr">
               <a:buNone/>
             </a:pPr>
             <a:r>
@@ -9024,6 +9219,13 @@
             <a:prstDash val="solid"/>
           </a:ln>
         </p:spPr>
+        <p:txBody>
+          <a:bodyPr/>
+          <a:lstStyle/>
+          <a:p>
+            <a:endParaRPr lang="pt-BR"/>
+          </a:p>
+        </p:txBody>
       </p:sp>
       <p:sp>
         <p:nvSpPr>
@@ -9046,7 +9248,7 @@
           <a:bodyPr wrap="square" rtlCol="0" anchor="ctr"/>
           <a:lstStyle/>
           <a:p>
-            <a:pPr algn="ctr" indent="0" marL="0">
+            <a:pPr marL="0" indent="0" algn="ctr">
               <a:buNone/>
             </a:pPr>
             <a:r>
@@ -9085,7 +9287,7 @@
           <a:bodyPr wrap="square" rtlCol="0" anchor="ctr"/>
           <a:lstStyle/>
           <a:p>
-            <a:pPr algn="ctr" indent="0" marL="0">
+            <a:pPr marL="0" indent="0" algn="ctr">
               <a:buNone/>
             </a:pPr>
             <a:r>
@@ -9127,6 +9329,13 @@
             <a:prstDash val="solid"/>
           </a:ln>
         </p:spPr>
+        <p:txBody>
+          <a:bodyPr/>
+          <a:lstStyle/>
+          <a:p>
+            <a:endParaRPr lang="pt-BR"/>
+          </a:p>
+        </p:txBody>
       </p:sp>
       <p:sp>
         <p:nvSpPr>
@@ -9149,7 +9358,7 @@
           <a:bodyPr wrap="square" rtlCol="0" anchor="ctr"/>
           <a:lstStyle/>
           <a:p>
-            <a:pPr algn="ctr" indent="0" marL="0">
+            <a:pPr marL="0" indent="0" algn="ctr">
               <a:buNone/>
             </a:pPr>
             <a:r>
@@ -9188,7 +9397,7 @@
           <a:bodyPr wrap="square" rtlCol="0" anchor="ctr"/>
           <a:lstStyle/>
           <a:p>
-            <a:pPr algn="ctr" indent="0" marL="0">
+            <a:pPr marL="0" indent="0" algn="ctr">
               <a:buNone/>
             </a:pPr>
             <a:r>
@@ -9230,6 +9439,13 @@
             <a:prstDash val="solid"/>
           </a:ln>
         </p:spPr>
+        <p:txBody>
+          <a:bodyPr/>
+          <a:lstStyle/>
+          <a:p>
+            <a:endParaRPr lang="pt-BR"/>
+          </a:p>
+        </p:txBody>
       </p:sp>
       <p:sp>
         <p:nvSpPr>
@@ -9252,7 +9468,7 @@
           <a:bodyPr wrap="square" rtlCol="0" anchor="ctr"/>
           <a:lstStyle/>
           <a:p>
-            <a:pPr algn="ctr" indent="0" marL="0">
+            <a:pPr marL="0" indent="0" algn="ctr">
               <a:buNone/>
             </a:pPr>
             <a:r>
@@ -9291,7 +9507,7 @@
           <a:bodyPr wrap="square" rtlCol="0" anchor="ctr"/>
           <a:lstStyle/>
           <a:p>
-            <a:pPr algn="ctr" indent="0" marL="0">
+            <a:pPr marL="0" indent="0" algn="ctr">
               <a:buNone/>
             </a:pPr>
             <a:r>
@@ -9333,6 +9549,13 @@
             <a:prstDash val="solid"/>
           </a:ln>
         </p:spPr>
+        <p:txBody>
+          <a:bodyPr/>
+          <a:lstStyle/>
+          <a:p>
+            <a:endParaRPr lang="pt-BR"/>
+          </a:p>
+        </p:txBody>
       </p:sp>
       <p:sp>
         <p:nvSpPr>
@@ -9355,7 +9578,7 @@
           <a:bodyPr wrap="square" rtlCol="0" anchor="ctr"/>
           <a:lstStyle/>
           <a:p>
-            <a:pPr algn="ctr" indent="0" marL="0">
+            <a:pPr marL="0" indent="0" algn="ctr">
               <a:buNone/>
             </a:pPr>
             <a:r>
@@ -9394,7 +9617,7 @@
           <a:bodyPr wrap="square" rtlCol="0" anchor="ctr"/>
           <a:lstStyle/>
           <a:p>
-            <a:pPr algn="ctr" indent="0" marL="0">
+            <a:pPr marL="0" indent="0" algn="ctr">
               <a:buNone/>
             </a:pPr>
             <a:r>
@@ -9436,6 +9659,13 @@
             <a:prstDash val="solid"/>
           </a:ln>
         </p:spPr>
+        <p:txBody>
+          <a:bodyPr/>
+          <a:lstStyle/>
+          <a:p>
+            <a:endParaRPr lang="pt-BR"/>
+          </a:p>
+        </p:txBody>
       </p:sp>
       <p:sp>
         <p:nvSpPr>
@@ -9458,7 +9688,7 @@
           <a:bodyPr wrap="square" rtlCol="0" anchor="ctr"/>
           <a:lstStyle/>
           <a:p>
-            <a:pPr algn="ctr" indent="0" marL="0">
+            <a:pPr marL="0" indent="0" algn="ctr">
               <a:buNone/>
             </a:pPr>
             <a:r>
@@ -9497,7 +9727,7 @@
           <a:bodyPr wrap="square" rtlCol="0" anchor="ctr"/>
           <a:lstStyle/>
           <a:p>
-            <a:pPr algn="ctr" indent="0" marL="0">
+            <a:pPr marL="0" indent="0" algn="ctr">
               <a:buNone/>
             </a:pPr>
             <a:r>
@@ -9539,6 +9769,13 @@
             <a:prstDash val="solid"/>
           </a:ln>
         </p:spPr>
+        <p:txBody>
+          <a:bodyPr/>
+          <a:lstStyle/>
+          <a:p>
+            <a:endParaRPr lang="pt-BR"/>
+          </a:p>
+        </p:txBody>
       </p:sp>
       <p:sp>
         <p:nvSpPr>
@@ -9561,7 +9798,7 @@
           <a:bodyPr wrap="square" rtlCol="0" anchor="ctr"/>
           <a:lstStyle/>
           <a:p>
-            <a:pPr algn="ctr" indent="0" marL="0">
+            <a:pPr marL="0" indent="0" algn="ctr">
               <a:buNone/>
             </a:pPr>
             <a:r>
@@ -9600,11 +9837,11 @@
           <a:bodyPr wrap="square" rtlCol="0" anchor="ctr"/>
           <a:lstStyle/>
           <a:p>
-            <a:pPr indent="0" marL="0">
-              <a:buNone/>
-            </a:pPr>
-            <a:r>
-              <a:rPr lang="en-US" sz="950" b="1" spc="140" kern="0" dirty="0">
+            <a:pPr marL="0" indent="0">
+              <a:buNone/>
+            </a:pPr>
+            <a:r>
+              <a:rPr lang="en-US" sz="950" b="1" kern="0" spc="140" dirty="0">
                 <a:solidFill>
                   <a:srgbClr val="767E86"/>
                 </a:solidFill>
@@ -9642,6 +9879,13 @@
             <a:prstDash val="solid"/>
           </a:ln>
         </p:spPr>
+        <p:txBody>
+          <a:bodyPr/>
+          <a:lstStyle/>
+          <a:p>
+            <a:endParaRPr lang="pt-BR"/>
+          </a:p>
+        </p:txBody>
       </p:sp>
       <p:sp>
         <p:nvSpPr>
@@ -9664,7 +9908,7 @@
           <a:bodyPr wrap="square" rtlCol="0" anchor="ctr"/>
           <a:lstStyle/>
           <a:p>
-            <a:pPr algn="ctr" indent="0" marL="0">
+            <a:pPr marL="0" indent="0" algn="ctr">
               <a:buNone/>
             </a:pPr>
             <a:r>
@@ -9703,7 +9947,7 @@
           <a:bodyPr wrap="square" rtlCol="0" anchor="ctr"/>
           <a:lstStyle/>
           <a:p>
-            <a:pPr algn="ctr" indent="0" marL="0">
+            <a:pPr marL="0" indent="0" algn="ctr">
               <a:buNone/>
             </a:pPr>
             <a:r>
@@ -9745,6 +9989,13 @@
             <a:prstDash val="solid"/>
           </a:ln>
         </p:spPr>
+        <p:txBody>
+          <a:bodyPr/>
+          <a:lstStyle/>
+          <a:p>
+            <a:endParaRPr lang="pt-BR"/>
+          </a:p>
+        </p:txBody>
       </p:sp>
       <p:sp>
         <p:nvSpPr>
@@ -9767,7 +10018,7 @@
           <a:bodyPr wrap="square" rtlCol="0" anchor="ctr"/>
           <a:lstStyle/>
           <a:p>
-            <a:pPr algn="ctr" indent="0" marL="0">
+            <a:pPr marL="0" indent="0" algn="ctr">
               <a:buNone/>
             </a:pPr>
             <a:r>
@@ -9806,7 +10057,7 @@
           <a:bodyPr wrap="square" rtlCol="0" anchor="ctr"/>
           <a:lstStyle/>
           <a:p>
-            <a:pPr algn="ctr" indent="0" marL="0">
+            <a:pPr marL="0" indent="0" algn="ctr">
               <a:buNone/>
             </a:pPr>
             <a:r>
@@ -9848,6 +10099,13 @@
             <a:prstDash val="solid"/>
           </a:ln>
         </p:spPr>
+        <p:txBody>
+          <a:bodyPr/>
+          <a:lstStyle/>
+          <a:p>
+            <a:endParaRPr lang="pt-BR"/>
+          </a:p>
+        </p:txBody>
       </p:sp>
       <p:sp>
         <p:nvSpPr>
@@ -9870,7 +10128,7 @@
           <a:bodyPr wrap="square" rtlCol="0" anchor="ctr"/>
           <a:lstStyle/>
           <a:p>
-            <a:pPr algn="ctr" indent="0" marL="0">
+            <a:pPr marL="0" indent="0" algn="ctr">
               <a:buNone/>
             </a:pPr>
             <a:r>
@@ -9909,7 +10167,7 @@
           <a:bodyPr wrap="square" rtlCol="0" anchor="ctr"/>
           <a:lstStyle/>
           <a:p>
-            <a:pPr algn="ctr" indent="0" marL="0">
+            <a:pPr marL="0" indent="0" algn="ctr">
               <a:buNone/>
             </a:pPr>
             <a:r>
@@ -9951,6 +10209,13 @@
             <a:prstDash val="solid"/>
           </a:ln>
         </p:spPr>
+        <p:txBody>
+          <a:bodyPr/>
+          <a:lstStyle/>
+          <a:p>
+            <a:endParaRPr lang="pt-BR"/>
+          </a:p>
+        </p:txBody>
       </p:sp>
       <p:sp>
         <p:nvSpPr>
@@ -9973,7 +10238,7 @@
           <a:bodyPr wrap="square" rtlCol="0" anchor="ctr"/>
           <a:lstStyle/>
           <a:p>
-            <a:pPr algn="ctr" indent="0" marL="0">
+            <a:pPr marL="0" indent="0" algn="ctr">
               <a:buNone/>
             </a:pPr>
             <a:r>
@@ -10010,6 +10275,13 @@
           </a:solidFill>
           <a:ln/>
         </p:spPr>
+        <p:txBody>
+          <a:bodyPr/>
+          <a:lstStyle/>
+          <a:p>
+            <a:endParaRPr lang="pt-BR"/>
+          </a:p>
+        </p:txBody>
       </p:sp>
       <p:sp>
         <p:nvSpPr>
@@ -10032,11 +10304,11 @@
           <a:bodyPr wrap="square" rtlCol="0" anchor="ctr"/>
           <a:lstStyle/>
           <a:p>
-            <a:pPr indent="0" marL="0">
-              <a:buNone/>
-            </a:pPr>
-            <a:r>
-              <a:rPr lang="en-US" sz="950" b="1" spc="140" kern="0" dirty="0">
+            <a:pPr marL="0" indent="0">
+              <a:buNone/>
+            </a:pPr>
+            <a:r>
+              <a:rPr lang="en-US" sz="950" b="1" kern="0" spc="140" dirty="0">
                 <a:solidFill>
                   <a:srgbClr val="767E86"/>
                 </a:solidFill>
@@ -10071,7 +10343,7 @@
           <a:bodyPr wrap="square" rtlCol="0" anchor="t"/>
           <a:lstStyle/>
           <a:p>
-            <a:pPr indent="0" marL="0">
+            <a:pPr marL="0" indent="0">
               <a:lnSpc>
                 <a:spcPts val="2200"/>
               </a:lnSpc>
@@ -10113,7 +10385,7 @@
           <a:bodyPr wrap="square" rtlCol="0" anchor="t"/>
           <a:lstStyle/>
           <a:p>
-            <a:pPr indent="0" marL="0">
+            <a:pPr marL="0" indent="0">
               <a:lnSpc>
                 <a:spcPts val="1900"/>
               </a:lnSpc>
@@ -10153,6 +10425,13 @@
           </a:solidFill>
           <a:ln/>
         </p:spPr>
+        <p:txBody>
+          <a:bodyPr/>
+          <a:lstStyle/>
+          <a:p>
+            <a:endParaRPr lang="pt-BR"/>
+          </a:p>
+        </p:txBody>
       </p:sp>
       <p:sp>
         <p:nvSpPr>
@@ -10175,11 +10454,11 @@
           <a:bodyPr wrap="square" rtlCol="0" anchor="ctr"/>
           <a:lstStyle/>
           <a:p>
-            <a:pPr indent="0" marL="0">
-              <a:buNone/>
-            </a:pPr>
-            <a:r>
-              <a:rPr lang="en-US" sz="950" b="1" spc="140" kern="0" dirty="0">
+            <a:pPr marL="0" indent="0">
+              <a:buNone/>
+            </a:pPr>
+            <a:r>
+              <a:rPr lang="en-US" sz="950" b="1" kern="0" spc="140" dirty="0">
                 <a:solidFill>
                   <a:srgbClr val="767E86"/>
                 </a:solidFill>
@@ -10214,7 +10493,7 @@
           <a:bodyPr wrap="square" rtlCol="0" anchor="t"/>
           <a:lstStyle/>
           <a:p>
-            <a:pPr indent="0" marL="0">
+            <a:pPr marL="0" indent="0">
               <a:lnSpc>
                 <a:spcPts val="2200"/>
               </a:lnSpc>
@@ -10256,7 +10535,7 @@
           <a:bodyPr wrap="square" rtlCol="0" anchor="t"/>
           <a:lstStyle/>
           <a:p>
-            <a:pPr indent="0" marL="0">
+            <a:pPr marL="0" indent="0">
               <a:lnSpc>
                 <a:spcPts val="1900"/>
               </a:lnSpc>
@@ -10296,6 +10575,13 @@
           </a:solidFill>
           <a:ln/>
         </p:spPr>
+        <p:txBody>
+          <a:bodyPr/>
+          <a:lstStyle/>
+          <a:p>
+            <a:endParaRPr lang="pt-BR"/>
+          </a:p>
+        </p:txBody>
       </p:sp>
       <p:sp>
         <p:nvSpPr>
@@ -10318,11 +10604,11 @@
           <a:bodyPr wrap="square" rtlCol="0" anchor="ctr"/>
           <a:lstStyle/>
           <a:p>
-            <a:pPr indent="0" marL="0">
-              <a:buNone/>
-            </a:pPr>
-            <a:r>
-              <a:rPr lang="en-US" sz="950" b="1" spc="140" kern="0" dirty="0">
+            <a:pPr marL="0" indent="0">
+              <a:buNone/>
+            </a:pPr>
+            <a:r>
+              <a:rPr lang="en-US" sz="950" b="1" kern="0" spc="140" dirty="0">
                 <a:solidFill>
                   <a:srgbClr val="767E86"/>
                 </a:solidFill>
@@ -10357,7 +10643,7 @@
           <a:bodyPr wrap="square" rtlCol="0" anchor="t"/>
           <a:lstStyle/>
           <a:p>
-            <a:pPr indent="0" marL="0">
+            <a:pPr marL="0" indent="0">
               <a:lnSpc>
                 <a:spcPts val="2200"/>
               </a:lnSpc>
@@ -10399,7 +10685,7 @@
           <a:bodyPr wrap="square" rtlCol="0" anchor="t"/>
           <a:lstStyle/>
           <a:p>
-            <a:pPr indent="0" marL="0">
+            <a:pPr marL="0" indent="0">
               <a:lnSpc>
                 <a:spcPts val="1900"/>
               </a:lnSpc>
@@ -10439,6 +10725,13 @@
           </a:solidFill>
           <a:ln/>
         </p:spPr>
+        <p:txBody>
+          <a:bodyPr/>
+          <a:lstStyle/>
+          <a:p>
+            <a:endParaRPr lang="pt-BR"/>
+          </a:p>
+        </p:txBody>
       </p:sp>
       <p:sp>
         <p:nvSpPr>
@@ -10461,7 +10754,7 @@
           <a:bodyPr wrap="square" rtlCol="0" anchor="ctr"/>
           <a:lstStyle/>
           <a:p>
-            <a:pPr algn="r" indent="0" marL="0">
+            <a:pPr marL="0" indent="0" algn="r">
               <a:buNone/>
             </a:pPr>
             <a:r>
@@ -10495,6 +10788,7 @@
         <a:solidFill>
           <a:srgbClr val="F5F2ED"/>
         </a:solidFill>
+        <a:effectLst/>
       </p:bgPr>
     </p:bg>
     <p:spTree>
@@ -10532,7 +10826,7 @@
           <a:bodyPr wrap="square" rtlCol="0" anchor="b"/>
           <a:lstStyle/>
           <a:p>
-            <a:pPr indent="0" marL="0">
+            <a:pPr marL="0" indent="0">
               <a:buNone/>
             </a:pPr>
             <a:r>
@@ -10569,6 +10863,13 @@
           </a:solidFill>
           <a:ln/>
         </p:spPr>
+        <p:txBody>
+          <a:bodyPr/>
+          <a:lstStyle/>
+          <a:p>
+            <a:endParaRPr lang="pt-BR"/>
+          </a:p>
+        </p:txBody>
       </p:sp>
       <p:sp>
         <p:nvSpPr>
@@ -10591,7 +10892,7 @@
           <a:bodyPr wrap="square" rtlCol="0" anchor="t"/>
           <a:lstStyle/>
           <a:p>
-            <a:pPr indent="0" marL="0">
+            <a:pPr marL="0" indent="0">
               <a:lnSpc>
                 <a:spcPts val="2400"/>
               </a:lnSpc>
@@ -10631,6 +10932,13 @@
           </a:solidFill>
           <a:ln/>
         </p:spPr>
+        <p:txBody>
+          <a:bodyPr/>
+          <a:lstStyle/>
+          <a:p>
+            <a:endParaRPr lang="pt-BR"/>
+          </a:p>
+        </p:txBody>
       </p:sp>
       <p:sp>
         <p:nvSpPr>
@@ -10653,11 +10961,11 @@
           <a:bodyPr wrap="square" rtlCol="0" anchor="ctr"/>
           <a:lstStyle/>
           <a:p>
-            <a:pPr indent="0" marL="0">
-              <a:buNone/>
-            </a:pPr>
-            <a:r>
-              <a:rPr lang="en-US" sz="950" b="1" spc="140" kern="0" dirty="0">
+            <a:pPr marL="0" indent="0">
+              <a:buNone/>
+            </a:pPr>
+            <a:r>
+              <a:rPr lang="en-US" sz="950" b="1" kern="0" spc="140" dirty="0">
                 <a:solidFill>
                   <a:srgbClr val="767E86"/>
                 </a:solidFill>
@@ -10692,7 +11000,7 @@
           <a:bodyPr wrap="square" rtlCol="0" anchor="t"/>
           <a:lstStyle/>
           <a:p>
-            <a:pPr indent="0" marL="0">
+            <a:pPr marL="0" indent="0">
               <a:lnSpc>
                 <a:spcPts val="2200"/>
               </a:lnSpc>
@@ -10734,7 +11042,7 @@
           <a:bodyPr wrap="square" rtlCol="0" anchor="t"/>
           <a:lstStyle/>
           <a:p>
-            <a:pPr indent="0" marL="0">
+            <a:pPr marL="0" indent="0">
               <a:lnSpc>
                 <a:spcPts val="1900"/>
               </a:lnSpc>
@@ -10774,6 +11082,13 @@
           </a:solidFill>
           <a:ln/>
         </p:spPr>
+        <p:txBody>
+          <a:bodyPr/>
+          <a:lstStyle/>
+          <a:p>
+            <a:endParaRPr lang="pt-BR"/>
+          </a:p>
+        </p:txBody>
       </p:sp>
       <p:sp>
         <p:nvSpPr>
@@ -10796,11 +11111,11 @@
           <a:bodyPr wrap="square" rtlCol="0" anchor="ctr"/>
           <a:lstStyle/>
           <a:p>
-            <a:pPr indent="0" marL="0">
-              <a:buNone/>
-            </a:pPr>
-            <a:r>
-              <a:rPr lang="en-US" sz="950" b="1" spc="140" kern="0" dirty="0">
+            <a:pPr marL="0" indent="0">
+              <a:buNone/>
+            </a:pPr>
+            <a:r>
+              <a:rPr lang="en-US" sz="950" b="1" kern="0" spc="140" dirty="0">
                 <a:solidFill>
                   <a:srgbClr val="767E86"/>
                 </a:solidFill>
@@ -10835,7 +11150,7 @@
           <a:bodyPr wrap="square" rtlCol="0" anchor="t"/>
           <a:lstStyle/>
           <a:p>
-            <a:pPr indent="0" marL="0">
+            <a:pPr marL="0" indent="0">
               <a:lnSpc>
                 <a:spcPts val="2200"/>
               </a:lnSpc>
@@ -10877,7 +11192,7 @@
           <a:bodyPr wrap="square" rtlCol="0" anchor="t"/>
           <a:lstStyle/>
           <a:p>
-            <a:pPr indent="0" marL="0">
+            <a:pPr marL="0" indent="0">
               <a:lnSpc>
                 <a:spcPts val="1900"/>
               </a:lnSpc>
@@ -10917,6 +11232,13 @@
           </a:solidFill>
           <a:ln/>
         </p:spPr>
+        <p:txBody>
+          <a:bodyPr/>
+          <a:lstStyle/>
+          <a:p>
+            <a:endParaRPr lang="pt-BR"/>
+          </a:p>
+        </p:txBody>
       </p:sp>
       <p:sp>
         <p:nvSpPr>
@@ -10939,11 +11261,11 @@
           <a:bodyPr wrap="square" rtlCol="0" anchor="ctr"/>
           <a:lstStyle/>
           <a:p>
-            <a:pPr indent="0" marL="0">
-              <a:buNone/>
-            </a:pPr>
-            <a:r>
-              <a:rPr lang="en-US" sz="950" b="1" spc="140" kern="0" dirty="0">
+            <a:pPr marL="0" indent="0">
+              <a:buNone/>
+            </a:pPr>
+            <a:r>
+              <a:rPr lang="en-US" sz="950" b="1" kern="0" spc="140" dirty="0">
                 <a:solidFill>
                   <a:srgbClr val="767E86"/>
                 </a:solidFill>
@@ -10978,7 +11300,7 @@
           <a:bodyPr wrap="square" rtlCol="0" anchor="t"/>
           <a:lstStyle/>
           <a:p>
-            <a:pPr indent="0" marL="0">
+            <a:pPr marL="0" indent="0">
               <a:lnSpc>
                 <a:spcPts val="2200"/>
               </a:lnSpc>
@@ -11020,7 +11342,7 @@
           <a:bodyPr wrap="square" rtlCol="0" anchor="t"/>
           <a:lstStyle/>
           <a:p>
-            <a:pPr indent="0" marL="0">
+            <a:pPr marL="0" indent="0">
               <a:lnSpc>
                 <a:spcPts val="1900"/>
               </a:lnSpc>
@@ -11060,6 +11382,13 @@
           </a:solidFill>
           <a:ln/>
         </p:spPr>
+        <p:txBody>
+          <a:bodyPr/>
+          <a:lstStyle/>
+          <a:p>
+            <a:endParaRPr lang="pt-BR"/>
+          </a:p>
+        </p:txBody>
       </p:sp>
       <p:sp>
         <p:nvSpPr>
@@ -11082,7 +11411,7 @@
           <a:bodyPr wrap="square" rtlCol="0" anchor="t"/>
           <a:lstStyle/>
           <a:p>
-            <a:pPr indent="0" marL="0">
+            <a:pPr marL="0" indent="0">
               <a:lnSpc>
                 <a:spcPts val="2200"/>
               </a:lnSpc>
@@ -11099,12 +11428,6 @@
               </a:rPr>
               <a:t>Conceitos exercitados:</a:t>
             </a:r>
-            <a:pPr indent="0" marL="0">
-              <a:lnSpc>
-                <a:spcPts val="2200"/>
-              </a:lnSpc>
-              <a:buNone/>
-            </a:pPr>
             <a:r>
               <a:rPr lang="en-US" sz="1400" dirty="0">
                 <a:solidFill>
@@ -11139,6 +11462,13 @@
           </a:solidFill>
           <a:ln/>
         </p:spPr>
+        <p:txBody>
+          <a:bodyPr/>
+          <a:lstStyle/>
+          <a:p>
+            <a:endParaRPr lang="pt-BR"/>
+          </a:p>
+        </p:txBody>
       </p:sp>
       <p:sp>
         <p:nvSpPr>
@@ -11161,7 +11491,7 @@
           <a:bodyPr wrap="square" rtlCol="0" anchor="ctr"/>
           <a:lstStyle/>
           <a:p>
-            <a:pPr algn="r" indent="0" marL="0">
+            <a:pPr marL="0" indent="0" algn="r">
               <a:buNone/>
             </a:pPr>
             <a:r>
@@ -11480,4 +11810,319 @@
     </a:ext>
   </a:extLst>
 </a:theme>
+</file>
+
+<file path=ppt/theme/theme2.xml><?xml version="1.0" encoding="utf-8"?>
+<a:theme xmlns:a="http://schemas.openxmlformats.org/drawingml/2006/main" name="Tema do Office">
+  <a:themeElements>
+    <a:clrScheme name="Office">
+      <a:dk1>
+        <a:sysClr val="windowText" lastClr="000000"/>
+      </a:dk1>
+      <a:lt1>
+        <a:sysClr val="window" lastClr="FFFFFF"/>
+      </a:lt1>
+      <a:dk2>
+        <a:srgbClr val="0E2841"/>
+      </a:dk2>
+      <a:lt2>
+        <a:srgbClr val="E8E8E8"/>
+      </a:lt2>
+      <a:accent1>
+        <a:srgbClr val="156082"/>
+      </a:accent1>
+      <a:accent2>
+        <a:srgbClr val="E97132"/>
+      </a:accent2>
+      <a:accent3>
+        <a:srgbClr val="196B24"/>
+      </a:accent3>
+      <a:accent4>
+        <a:srgbClr val="0F9ED5"/>
+      </a:accent4>
+      <a:accent5>
+        <a:srgbClr val="A02B93"/>
+      </a:accent5>
+      <a:accent6>
+        <a:srgbClr val="4EA72E"/>
+      </a:accent6>
+      <a:hlink>
+        <a:srgbClr val="467886"/>
+      </a:hlink>
+      <a:folHlink>
+        <a:srgbClr val="96607D"/>
+      </a:folHlink>
+    </a:clrScheme>
+    <a:fontScheme name="Office">
+      <a:majorFont>
+        <a:latin typeface="Aptos Display" panose="02110004020202020204"/>
+        <a:ea typeface=""/>
+        <a:cs typeface=""/>
+        <a:font script="Jpan" typeface="游ゴシック Light"/>
+        <a:font script="Hang" typeface="맑은 고딕"/>
+        <a:font script="Hans" typeface="等线 Light"/>
+        <a:font script="Hant" typeface="新細明體"/>
+        <a:font script="Arab" typeface="Times New Roman"/>
+        <a:font script="Hebr" typeface="Times New Roman"/>
+        <a:font script="Thai" typeface="Angsana New"/>
+        <a:font script="Ethi" typeface="Nyala"/>
+        <a:font script="Beng" typeface="Vrinda"/>
+        <a:font script="Gujr" typeface="Shruti"/>
+        <a:font script="Khmr" typeface="MoolBoran"/>
+        <a:font script="Knda" typeface="Tunga"/>
+        <a:font script="Guru" typeface="Raavi"/>
+        <a:font script="Cans" typeface="Euphemia"/>
+        <a:font script="Cher" typeface="Plantagenet Cherokee"/>
+        <a:font script="Yiii" typeface="Microsoft Yi Baiti"/>
+        <a:font script="Tibt" typeface="Microsoft Himalaya"/>
+        <a:font script="Thaa" typeface="MV Boli"/>
+        <a:font script="Deva" typeface="Mangal"/>
+        <a:font script="Telu" typeface="Gautami"/>
+        <a:font script="Taml" typeface="Latha"/>
+        <a:font script="Syrc" typeface="Estrangelo Edessa"/>
+        <a:font script="Orya" typeface="Kalinga"/>
+        <a:font script="Mlym" typeface="Kartika"/>
+        <a:font script="Laoo" typeface="DokChampa"/>
+        <a:font script="Sinh" typeface="Iskoola Pota"/>
+        <a:font script="Mong" typeface="Mongolian Baiti"/>
+        <a:font script="Viet" typeface="Times New Roman"/>
+        <a:font script="Uigh" typeface="Microsoft Uighur"/>
+        <a:font script="Geor" typeface="Sylfaen"/>
+        <a:font script="Armn" typeface="Arial"/>
+        <a:font script="Bugi" typeface="Leelawadee UI"/>
+        <a:font script="Bopo" typeface="Microsoft JhengHei"/>
+        <a:font script="Java" typeface="Javanese Text"/>
+        <a:font script="Lisu" typeface="Segoe UI"/>
+        <a:font script="Mymr" typeface="Myanmar Text"/>
+        <a:font script="Nkoo" typeface="Ebrima"/>
+        <a:font script="Olck" typeface="Nirmala UI"/>
+        <a:font script="Osma" typeface="Ebrima"/>
+        <a:font script="Phag" typeface="Phagspa"/>
+        <a:font script="Syrn" typeface="Estrangelo Edessa"/>
+        <a:font script="Syrj" typeface="Estrangelo Edessa"/>
+        <a:font script="Syre" typeface="Estrangelo Edessa"/>
+        <a:font script="Sora" typeface="Nirmala UI"/>
+        <a:font script="Tale" typeface="Microsoft Tai Le"/>
+        <a:font script="Talu" typeface="Microsoft New Tai Lue"/>
+        <a:font script="Tfng" typeface="Ebrima"/>
+      </a:majorFont>
+      <a:minorFont>
+        <a:latin typeface="Aptos" panose="02110004020202020204"/>
+        <a:ea typeface=""/>
+        <a:cs typeface=""/>
+        <a:font script="Jpan" typeface="游ゴシック"/>
+        <a:font script="Hang" typeface="맑은 고딕"/>
+        <a:font script="Hans" typeface="等线"/>
+        <a:font script="Hant" typeface="新細明體"/>
+        <a:font script="Arab" typeface="Arial"/>
+        <a:font script="Hebr" typeface="Arial"/>
+        <a:font script="Thai" typeface="Cordia New"/>
+        <a:font script="Ethi" typeface="Nyala"/>
+        <a:font script="Beng" typeface="Vrinda"/>
+        <a:font script="Gujr" typeface="Shruti"/>
+        <a:font script="Khmr" typeface="DaunPenh"/>
+        <a:font script="Knda" typeface="Tunga"/>
+        <a:font script="Guru" typeface="Raavi"/>
+        <a:font script="Cans" typeface="Euphemia"/>
+        <a:font script="Cher" typeface="Plantagenet Cherokee"/>
+        <a:font script="Yiii" typeface="Microsoft Yi Baiti"/>
+        <a:font script="Tibt" typeface="Microsoft Himalaya"/>
+        <a:font script="Thaa" typeface="MV Boli"/>
+        <a:font script="Deva" typeface="Mangal"/>
+        <a:font script="Telu" typeface="Gautami"/>
+        <a:font script="Taml" typeface="Latha"/>
+        <a:font script="Syrc" typeface="Estrangelo Edessa"/>
+        <a:font script="Orya" typeface="Kalinga"/>
+        <a:font script="Mlym" typeface="Kartika"/>
+        <a:font script="Laoo" typeface="DokChampa"/>
+        <a:font script="Sinh" typeface="Iskoola Pota"/>
+        <a:font script="Mong" typeface="Mongolian Baiti"/>
+        <a:font script="Viet" typeface="Arial"/>
+        <a:font script="Uigh" typeface="Microsoft Uighur"/>
+        <a:font script="Geor" typeface="Sylfaen"/>
+        <a:font script="Armn" typeface="Arial"/>
+        <a:font script="Bugi" typeface="Leelawadee UI"/>
+        <a:font script="Bopo" typeface="Microsoft JhengHei"/>
+        <a:font script="Java" typeface="Javanese Text"/>
+        <a:font script="Lisu" typeface="Segoe UI"/>
+        <a:font script="Mymr" typeface="Myanmar Text"/>
+        <a:font script="Nkoo" typeface="Ebrima"/>
+        <a:font script="Olck" typeface="Nirmala UI"/>
+        <a:font script="Osma" typeface="Ebrima"/>
+        <a:font script="Phag" typeface="Phagspa"/>
+        <a:font script="Syrn" typeface="Estrangelo Edessa"/>
+        <a:font script="Syrj" typeface="Estrangelo Edessa"/>
+        <a:font script="Syre" typeface="Estrangelo Edessa"/>
+        <a:font script="Sora" typeface="Nirmala UI"/>
+        <a:font script="Tale" typeface="Microsoft Tai Le"/>
+        <a:font script="Talu" typeface="Microsoft New Tai Lue"/>
+        <a:font script="Tfng" typeface="Ebrima"/>
+      </a:minorFont>
+    </a:fontScheme>
+    <a:fmtScheme name="Office">
+      <a:fillStyleLst>
+        <a:solidFill>
+          <a:schemeClr val="phClr"/>
+        </a:solidFill>
+        <a:gradFill rotWithShape="1">
+          <a:gsLst>
+            <a:gs pos="0">
+              <a:schemeClr val="phClr">
+                <a:lumMod val="110000"/>
+                <a:satMod val="105000"/>
+                <a:tint val="67000"/>
+              </a:schemeClr>
+            </a:gs>
+            <a:gs pos="50000">
+              <a:schemeClr val="phClr">
+                <a:lumMod val="105000"/>
+                <a:satMod val="103000"/>
+                <a:tint val="73000"/>
+              </a:schemeClr>
+            </a:gs>
+            <a:gs pos="100000">
+              <a:schemeClr val="phClr">
+                <a:lumMod val="105000"/>
+                <a:satMod val="109000"/>
+                <a:tint val="81000"/>
+              </a:schemeClr>
+            </a:gs>
+          </a:gsLst>
+          <a:lin ang="5400000" scaled="0"/>
+        </a:gradFill>
+        <a:gradFill rotWithShape="1">
+          <a:gsLst>
+            <a:gs pos="0">
+              <a:schemeClr val="phClr">
+                <a:satMod val="103000"/>
+                <a:lumMod val="102000"/>
+                <a:tint val="94000"/>
+              </a:schemeClr>
+            </a:gs>
+            <a:gs pos="50000">
+              <a:schemeClr val="phClr">
+                <a:satMod val="110000"/>
+                <a:lumMod val="100000"/>
+                <a:shade val="100000"/>
+              </a:schemeClr>
+            </a:gs>
+            <a:gs pos="100000">
+              <a:schemeClr val="phClr">
+                <a:lumMod val="99000"/>
+                <a:satMod val="120000"/>
+                <a:shade val="78000"/>
+              </a:schemeClr>
+            </a:gs>
+          </a:gsLst>
+          <a:lin ang="5400000" scaled="0"/>
+        </a:gradFill>
+      </a:fillStyleLst>
+      <a:lnStyleLst>
+        <a:ln w="12700" cap="flat" cmpd="sng" algn="ctr">
+          <a:solidFill>
+            <a:schemeClr val="phClr"/>
+          </a:solidFill>
+          <a:prstDash val="solid"/>
+          <a:miter lim="800000"/>
+        </a:ln>
+        <a:ln w="19050" cap="flat" cmpd="sng" algn="ctr">
+          <a:solidFill>
+            <a:schemeClr val="phClr"/>
+          </a:solidFill>
+          <a:prstDash val="solid"/>
+          <a:miter lim="800000"/>
+        </a:ln>
+        <a:ln w="25400" cap="flat" cmpd="sng" algn="ctr">
+          <a:solidFill>
+            <a:schemeClr val="phClr"/>
+          </a:solidFill>
+          <a:prstDash val="solid"/>
+          <a:miter lim="800000"/>
+        </a:ln>
+      </a:lnStyleLst>
+      <a:effectStyleLst>
+        <a:effectStyle>
+          <a:effectLst/>
+        </a:effectStyle>
+        <a:effectStyle>
+          <a:effectLst/>
+        </a:effectStyle>
+        <a:effectStyle>
+          <a:effectLst>
+            <a:outerShdw blurRad="57150" dist="19050" dir="5400000" algn="ctr" rotWithShape="0">
+              <a:srgbClr val="000000">
+                <a:alpha val="63000"/>
+              </a:srgbClr>
+            </a:outerShdw>
+          </a:effectLst>
+        </a:effectStyle>
+      </a:effectStyleLst>
+      <a:bgFillStyleLst>
+        <a:solidFill>
+          <a:schemeClr val="phClr"/>
+        </a:solidFill>
+        <a:solidFill>
+          <a:schemeClr val="phClr">
+            <a:tint val="95000"/>
+            <a:satMod val="170000"/>
+          </a:schemeClr>
+        </a:solidFill>
+        <a:gradFill rotWithShape="1">
+          <a:gsLst>
+            <a:gs pos="0">
+              <a:schemeClr val="phClr">
+                <a:tint val="93000"/>
+                <a:satMod val="150000"/>
+                <a:shade val="98000"/>
+                <a:lumMod val="102000"/>
+              </a:schemeClr>
+            </a:gs>
+            <a:gs pos="50000">
+              <a:schemeClr val="phClr">
+                <a:tint val="98000"/>
+                <a:satMod val="130000"/>
+                <a:shade val="90000"/>
+                <a:lumMod val="103000"/>
+              </a:schemeClr>
+            </a:gs>
+            <a:gs pos="100000">
+              <a:schemeClr val="phClr">
+                <a:shade val="63000"/>
+                <a:satMod val="120000"/>
+              </a:schemeClr>
+            </a:gs>
+          </a:gsLst>
+          <a:lin ang="5400000" scaled="0"/>
+        </a:gradFill>
+      </a:bgFillStyleLst>
+    </a:fmtScheme>
+  </a:themeElements>
+  <a:objectDefaults>
+    <a:lnDef>
+      <a:spPr/>
+      <a:bodyPr/>
+      <a:lstStyle/>
+      <a:style>
+        <a:lnRef idx="2">
+          <a:schemeClr val="accent1"/>
+        </a:lnRef>
+        <a:fillRef idx="0">
+          <a:schemeClr val="accent1"/>
+        </a:fillRef>
+        <a:effectRef idx="1">
+          <a:schemeClr val="accent1"/>
+        </a:effectRef>
+        <a:fontRef idx="minor">
+          <a:schemeClr val="tx1"/>
+        </a:fontRef>
+      </a:style>
+    </a:lnDef>
+  </a:objectDefaults>
+  <a:extraClrSchemeLst/>
+  <a:extLst>
+    <a:ext uri="{05A4C25C-085E-4340-85A3-A5531E510DB2}">
+      <thm15:themeFamily xmlns:thm15="http://schemas.microsoft.com/office/thememl/2012/main" name="Office Theme" id="{2E142A2C-CD16-42D6-873A-C26D2A0506FA}" vid="{1BDDFF52-6CD6-40A5-AB3C-68EB2F1E4D0A}"/>
+    </a:ext>
+  </a:extLst>
+</a:theme>
 </file>